--- a/mountaincar-safe-rl/video_report_deck_v2.pptx
+++ b/mountaincar-safe-rl/video_report_deck_v2.pptx
@@ -4,6 +4,9 @@
   <p:sldMasterIdLst>
     <p:sldMasterId id="2147483648" r:id="rId1"/>
   </p:sldMasterIdLst>
+  <p:notesMasterIdLst>
+    <p:notesMasterId r:id="rId12"/>
+  </p:notesMasterIdLst>
   <p:sldIdLst>
     <p:sldId id="256" r:id="rId2"/>
     <p:sldId id="257" r:id="rId3"/>
@@ -16,10 +19,7 @@
     <p:sldId id="264" r:id="rId10"/>
     <p:sldId id="265" r:id="rId11"/>
   </p:sldIdLst>
-  <p:notesMasterIdLst>
-    <p:notesMasterId r:id="rId12"/>
-  </p:notesMasterIdLst>
-  <p:sldSz cx="9144000" cy="5143500"/>
+  <p:sldSz cx="9144000" cy="5143500" type="screen16x9"/>
   <p:notesSz cx="5143500" cy="9144000"/>
   <p:defaultTextStyle>
     <a:lvl1pPr marL="0" algn="l" defTabSz="914400" rtl="0" eaLnBrk="1" latinLnBrk="0" hangingPunct="1">
@@ -113,6 +113,11 @@
       </a:defRPr>
     </a:lvl9pPr>
   </p:defaultTextStyle>
+  <p:extLst>
+    <p:ext uri="{EFAFB233-063F-42B5-8137-9DF3F51BA10A}">
+      <p15:sldGuideLst xmlns:p15="http://schemas.microsoft.com/office/powerpoint/2012/main"/>
+    </p:ext>
+  </p:extLst>
 </p:presentation>
 </file>
 
@@ -138,234 +143,10 @@
           <a:chExt cx="0" cy="0"/>
         </a:xfrm>
       </p:grpSpPr>
-      <p:sp>
-        <p:nvSpPr>
-          <p:cNvPr id="2" name="Header Placeholder 1"/>
-          <p:cNvSpPr>
-            <a:spLocks noGrp="1"/>
-          </p:cNvSpPr>
-          <p:nvPr>
-            <p:ph type="hdr" sz="quarter"/>
-          </p:nvPr>
-        </p:nvSpPr>
-        <p:spPr>
-          <a:xfrm>
-            <a:off x="0" y="0"/>
-            <a:ext cx="2971800" cy="458788"/>
-          </a:xfrm>
-          <a:prstGeom prst="rect">
-            <a:avLst/>
-          </a:prstGeom>
-        </p:spPr>
-        <p:txBody>
-          <a:bodyPr vert="horz" lIns="91440" tIns="45720" rIns="91440" bIns="45720" rtlCol="0"/>
-          <a:lstStyle>
-            <a:lvl1pPr algn="l">
-              <a:defRPr sz="1200"/>
-            </a:lvl1pPr>
-          </a:lstStyle>
-          <a:p>
-            <a:endParaRPr lang="en-US"/>
-          </a:p>
-        </p:txBody>
-      </p:sp>
-      <p:sp>
-        <p:nvSpPr>
-          <p:cNvPr id="3" name="Date Placeholder 2"/>
-          <p:cNvSpPr>
-            <a:spLocks noGrp="1"/>
-          </p:cNvSpPr>
-          <p:nvPr>
-            <p:ph type="dt" idx="1"/>
-          </p:nvPr>
-        </p:nvSpPr>
-        <p:spPr>
-          <a:xfrm>
-            <a:off x="3884613" y="0"/>
-            <a:ext cx="2971800" cy="458788"/>
-          </a:xfrm>
-          <a:prstGeom prst="rect">
-            <a:avLst/>
-          </a:prstGeom>
-        </p:spPr>
-        <p:txBody>
-          <a:bodyPr vert="horz" lIns="91440" tIns="45720" rIns="91440" bIns="45720" rtlCol="0"/>
-          <a:lstStyle>
-            <a:lvl1pPr algn="r">
-              <a:defRPr sz="1200"/>
-            </a:lvl1pPr>
-          </a:lstStyle>
-          <a:p>
-            <a:fld id="{5282F153-3F37-0F45-9E97-73ACFA13230C}" type="datetimeFigureOut">
-              <a:rPr lang="en-US"/>
-              <a:t>7/23/19</a:t>
-            </a:fld>
-            <a:endParaRPr lang="en-US"/>
-          </a:p>
-        </p:txBody>
-      </p:sp>
-      <p:sp>
-        <p:nvSpPr>
-          <p:cNvPr id="4" name="Slide Image Placeholder 3"/>
-          <p:cNvSpPr>
-            <a:spLocks noGrp="1" noRot="1" noChangeAspect="1"/>
-          </p:cNvSpPr>
-          <p:nvPr>
-            <p:ph type="sldImg" idx="2"/>
-          </p:nvPr>
-        </p:nvSpPr>
-        <p:spPr>
-          <a:xfrm>
-            <a:off x="685800" y="1143000"/>
-            <a:ext cx="5486400" cy="3086100"/>
-          </a:xfrm>
-          <a:prstGeom prst="rect">
-            <a:avLst/>
-          </a:prstGeom>
-          <a:noFill/>
-          <a:ln w="12700">
-            <a:solidFill>
-              <a:prstClr val="black"/>
-            </a:solidFill>
-          </a:ln>
-        </p:spPr>
-        <p:txBody>
-          <a:bodyPr vert="horz" lIns="91440" tIns="45720" rIns="91440" bIns="45720" rtlCol="0" anchor="ctr"/>
-          <a:lstStyle/>
-          <a:p>
-            <a:endParaRPr lang="en-US"/>
-          </a:p>
-        </p:txBody>
-      </p:sp>
-      <p:sp>
-        <p:nvSpPr>
-          <p:cNvPr id="5" name="Notes Placeholder 4"/>
-          <p:cNvSpPr>
-            <a:spLocks noGrp="1"/>
-          </p:cNvSpPr>
-          <p:nvPr>
-            <p:ph type="body" sz="quarter" idx="3"/>
-          </p:nvPr>
-        </p:nvSpPr>
-        <p:spPr>
-          <a:xfrm>
-            <a:off x="685800" y="4400550"/>
-            <a:ext cx="5486400" cy="3600450"/>
-          </a:xfrm>
-          <a:prstGeom prst="rect">
-            <a:avLst/>
-          </a:prstGeom>
-        </p:spPr>
-        <p:txBody>
-          <a:bodyPr vert="horz" lIns="91440" tIns="45720" rIns="91440" bIns="45720" rtlCol="0"/>
-          <a:lstStyle/>
-          <a:p>
-            <a:pPr lvl="0"/>
-            <a:r>
-              <a:rPr lang="en-US"/>
-              <a:t>Click to edit Master text styles</a:t>
-            </a:r>
-          </a:p>
-          <a:p>
-            <a:pPr lvl="1"/>
-            <a:r>
-              <a:rPr lang="en-US"/>
-              <a:t>Second level</a:t>
-            </a:r>
-          </a:p>
-          <a:p>
-            <a:pPr lvl="2"/>
-            <a:r>
-              <a:rPr lang="en-US"/>
-              <a:t>Third level</a:t>
-            </a:r>
-          </a:p>
-          <a:p>
-            <a:pPr lvl="3"/>
-            <a:r>
-              <a:rPr lang="en-US"/>
-              <a:t>Fourth level</a:t>
-            </a:r>
-          </a:p>
-          <a:p>
-            <a:pPr lvl="4"/>
-            <a:r>
-              <a:rPr lang="en-US"/>
-              <a:t>Fifth level</a:t>
-            </a:r>
-          </a:p>
-        </p:txBody>
-      </p:sp>
-      <p:sp>
-        <p:nvSpPr>
-          <p:cNvPr id="6" name="Footer Placeholder 5"/>
-          <p:cNvSpPr>
-            <a:spLocks noGrp="1"/>
-          </p:cNvSpPr>
-          <p:nvPr>
-            <p:ph type="ftr" sz="quarter" idx="4"/>
-          </p:nvPr>
-        </p:nvSpPr>
-        <p:spPr>
-          <a:xfrm>
-            <a:off x="0" y="8685213"/>
-            <a:ext cx="2971800" cy="458787"/>
-          </a:xfrm>
-          <a:prstGeom prst="rect">
-            <a:avLst/>
-          </a:prstGeom>
-        </p:spPr>
-        <p:txBody>
-          <a:bodyPr vert="horz" lIns="91440" tIns="45720" rIns="91440" bIns="45720" rtlCol="0" anchor="b"/>
-          <a:lstStyle>
-            <a:lvl1pPr algn="l">
-              <a:defRPr sz="1200"/>
-            </a:lvl1pPr>
-          </a:lstStyle>
-          <a:p>
-            <a:endParaRPr lang="en-US"/>
-          </a:p>
-        </p:txBody>
-      </p:sp>
-      <p:sp>
-        <p:nvSpPr>
-          <p:cNvPr id="7" name="Slide Number Placeholder 6"/>
-          <p:cNvSpPr>
-            <a:spLocks noGrp="1"/>
-          </p:cNvSpPr>
-          <p:nvPr>
-            <p:ph type="sldNum" sz="quarter" idx="5"/>
-          </p:nvPr>
-        </p:nvSpPr>
-        <p:spPr>
-          <a:xfrm>
-            <a:off x="3884613" y="8685213"/>
-            <a:ext cx="2971800" cy="458787"/>
-          </a:xfrm>
-          <a:prstGeom prst="rect">
-            <a:avLst/>
-          </a:prstGeom>
-        </p:spPr>
-        <p:txBody>
-          <a:bodyPr vert="horz" lIns="91440" tIns="45720" rIns="91440" bIns="45720" rtlCol="0" anchor="b"/>
-          <a:lstStyle>
-            <a:lvl1pPr algn="r">
-              <a:defRPr sz="1200"/>
-            </a:lvl1pPr>
-          </a:lstStyle>
-          <a:p>
-            <a:fld id="{CE5E9CC1-C706-0F49-92D6-E571CC5EEA8F}" type="slidenum">
-              <a:rPr lang="en-US"/>
-              <a:t>‹#›</a:t>
-            </a:fld>
-            <a:endParaRPr lang="en-US"/>
-          </a:p>
-        </p:txBody>
-      </p:sp>
     </p:spTree>
     <p:extLst>
       <p:ext uri="{BB962C8B-B14F-4D97-AF65-F5344CB8AC3E}">
-        <p14:creationId xmlns:p14="http://schemas.microsoft.com/office/powerpoint/2010/main" val="1024086991"/>
+        <p14:creationId xmlns:p14="http://schemas.microsoft.com/office/powerpoint/2010/main" val="2323296374"/>
       </p:ext>
     </p:extLst>
   </p:cSld>
@@ -513,7 +294,6 @@
               <a:rPr lang="en-US" dirty="0"/>
               <a:t>OPEN (Presenter A). 5-minute cut. Hook: to get the car over the hill it must build speed — but what if speed is exactly what we must limit? Energy, wear, safety. Can the agent reach the goal while keeping speed under control?</a:t>
             </a:r>
-            <a:endParaRPr lang="en-US" dirty="0"/>
           </a:p>
         </p:txBody>
       </p:sp>
@@ -601,7 +381,6 @@
               <a:rPr lang="en-US" dirty="0"/>
               <a:t>Close (all three). C: MountainCar makes constraint dynamics visible. B: lambda is a readable safety dial. A: choose the base by cost, not just reward. Thanks for watching.</a:t>
             </a:r>
-            <a:endParaRPr lang="en-US" dirty="0"/>
           </a:p>
         </p:txBody>
       </p:sp>
@@ -689,7 +468,6 @@
               <a:rPr lang="en-US" dirty="0"/>
               <a:t>Presenter A. Constrained RL: reward for the flag plus a proportional speed cost; budget 15; three agents on one shared shaped environment so the comparison is clean.</a:t>
             </a:r>
-            <a:endParaRPr lang="en-US" dirty="0"/>
           </a:p>
         </p:txBody>
       </p:sp>
@@ -777,7 +555,6 @@
               <a:rPr lang="en-US" dirty="0"/>
               <a:t>Presenter B. Cheap feasibility probe. Reckless ~29 (double budget); most cautious winner bottoms out ~11. Safe-and-successful exists, but the window is narrow.</a:t>
             </a:r>
-            <a:endParaRPr lang="en-US" dirty="0"/>
           </a:p>
         </p:txBody>
       </p:sp>
@@ -865,7 +642,6 @@
               <a:rPr lang="en-US" dirty="0"/>
               <a:t>Presenter B. Dual critic: reward + cost. Lambda = adaptive safety weight via dual ascent; turns up under violation, relaxes when safe. Self-tuning is the heart of the method.</a:t>
             </a:r>
-            <a:endParaRPr lang="en-US" dirty="0"/>
           </a:p>
         </p:txBody>
       </p:sp>
@@ -953,7 +729,6 @@
               <a:rPr lang="en-US" dirty="0"/>
               <a:t>Presenter C. Stage 1 ignores safety: 6 settings x 3 seeds. Two never learn, one unstable, three solve at return ~47.5. We also passively log each one's speed cost — the hidden tiebreaker.</a:t>
             </a:r>
-            <a:endParaRPr lang="en-US" dirty="0"/>
           </a:p>
         </p:txBody>
       </p:sp>
@@ -1041,7 +816,6 @@
               <a:rPr lang="en-US" dirty="0"/>
               <a:t>Presenter C. The three solving bases tie on reward but split ~2x on cost. Ranking by reward alone treats them as equal. Hold onto this gap.</a:t>
             </a:r>
-            <a:endParaRPr lang="en-US" dirty="0"/>
           </a:p>
         </p:txBody>
       </p:sp>
@@ -1129,7 +903,6 @@
               <a:rPr lang="en-US" dirty="0"/>
               <a:t>Presenter C sets up; Presenter A delivers the punchline. All P4-based configs stranded past the budget; low-cost bases reach the feasible region. The cheap passive-cost number was the difference between success and failure.</a:t>
             </a:r>
-            <a:endParaRPr lang="en-US" dirty="0"/>
           </a:p>
         </p:txBody>
       </p:sp>
@@ -1217,7 +990,6 @@
               <a:rPr lang="en-US" dirty="0"/>
               <a:t>Presenter A. Winner reaches full reward as fast as the unconstrained baseline; cost settles on the budget. Lambda spikes as the car first speeds, then relaxes — the method explaining itself.</a:t>
             </a:r>
-            <a:endParaRPr lang="en-US" dirty="0"/>
           </a:p>
         </p:txBody>
       </p:sp>
@@ -1305,7 +1077,6 @@
               <a:rPr lang="en-US" dirty="0"/>
               <a:t>Presenter B. First pass was deliberately disciplined. Extensions: 5-seed confirm; widen grid; budget sweep -&gt; Pareto (highest value); full ablation; fix cost metric. All run via the same scripts.</a:t>
             </a:r>
-            <a:endParaRPr lang="en-US" dirty="0"/>
           </a:p>
         </p:txBody>
       </p:sp>
@@ -1378,6 +1149,11 @@
 <file path=ppt/slideMasters/slideMaster1.xml><?xml version="1.0" encoding="utf-8"?>
 <p:sldMaster xmlns:a="http://schemas.openxmlformats.org/drawingml/2006/main" xmlns:r="http://schemas.openxmlformats.org/officeDocument/2006/relationships" xmlns:p="http://schemas.openxmlformats.org/presentationml/2006/main">
   <p:cSld>
+    <p:bg>
+      <p:bgRef idx="1001">
+        <a:schemeClr val="bg1"/>
+      </p:bgRef>
+    </p:bg>
     <p:spTree>
       <p:nvGrpSpPr>
         <p:cNvPr id="1" name=""/>
@@ -1660,6 +1436,7 @@
         <a:solidFill>
           <a:srgbClr val="0E2233"/>
         </a:solidFill>
+        <a:effectLst/>
       </p:bgPr>
     </p:bg>
     <p:spTree>
@@ -1697,6 +1474,13 @@
           </a:solidFill>
           <a:ln/>
         </p:spPr>
+        <p:txBody>
+          <a:bodyPr/>
+          <a:lstStyle/>
+          <a:p>
+            <a:endParaRPr lang="en-AU"/>
+          </a:p>
+        </p:txBody>
       </p:sp>
       <p:sp>
         <p:nvSpPr>
@@ -1722,6 +1506,13 @@
             <a:prstDash val="solid"/>
           </a:ln>
         </p:spPr>
+        <p:txBody>
+          <a:bodyPr/>
+          <a:lstStyle/>
+          <a:p>
+            <a:endParaRPr lang="en-AU"/>
+          </a:p>
+        </p:txBody>
       </p:sp>
       <p:sp>
         <p:nvSpPr>
@@ -1744,7 +1535,7 @@
           <a:bodyPr wrap="square" lIns="0" tIns="0" rIns="0" bIns="0" rtlCol="0" anchor="ctr"/>
           <a:lstStyle/>
           <a:p>
-            <a:pPr algn="ctr" indent="0" marL="0">
+            <a:pPr marL="0" indent="0" algn="ctr">
               <a:buNone/>
             </a:pPr>
             <a:r>
@@ -1783,11 +1574,11 @@
           <a:bodyPr wrap="square" lIns="0" tIns="0" rIns="0" bIns="0" rtlCol="0" anchor="ctr"/>
           <a:lstStyle/>
           <a:p>
-            <a:pPr algn="l" indent="0" marL="0">
+            <a:pPr marL="0" indent="0" algn="l">
               <a:buNone/>
             </a:pPr>
             <a:r>
-              <a:rPr lang="en-US" sz="1100" b="1" spc="200" kern="0" dirty="0">
+              <a:rPr lang="en-US" sz="1100" b="1" kern="0" spc="200" dirty="0">
                 <a:solidFill>
                   <a:srgbClr val="0F8B8D"/>
                 </a:solidFill>
@@ -1822,7 +1613,7 @@
           <a:bodyPr wrap="square" lIns="0" tIns="0" rIns="0" bIns="0" rtlCol="0" anchor="ctr"/>
           <a:lstStyle/>
           <a:p>
-            <a:pPr indent="0" marL="0">
+            <a:pPr marL="0" indent="0">
               <a:buNone/>
             </a:pPr>
             <a:r>
@@ -1861,7 +1652,7 @@
           <a:bodyPr wrap="square" lIns="0" tIns="0" rIns="0" bIns="0" rtlCol="0" anchor="ctr"/>
           <a:lstStyle/>
           <a:p>
-            <a:pPr indent="0" marL="0">
+            <a:pPr marL="0" indent="0">
               <a:buNone/>
             </a:pPr>
             <a:r>
@@ -1900,11 +1691,11 @@
           <a:bodyPr wrap="square" lIns="0" tIns="0" rIns="0" bIns="0" rtlCol="0" anchor="ctr"/>
           <a:lstStyle/>
           <a:p>
-            <a:pPr indent="0" marL="0">
+            <a:pPr marL="0" indent="0">
               <a:buNone/>
             </a:pPr>
             <a:r>
-              <a:rPr lang="en-US" sz="1000" b="1" spc="200" kern="0" dirty="0">
+              <a:rPr lang="en-US" sz="1000" b="1" kern="0" spc="200" dirty="0">
                 <a:solidFill>
                   <a:srgbClr val="7E94A0"/>
                 </a:solidFill>
@@ -1939,7 +1730,7 @@
           <a:bodyPr wrap="square" lIns="0" tIns="0" rIns="0" bIns="0" rtlCol="0" anchor="ctr"/>
           <a:lstStyle/>
           <a:p>
-            <a:pPr indent="0" marL="0">
+            <a:pPr marL="0" indent="0">
               <a:buNone/>
             </a:pPr>
             <a:r>
@@ -1953,9 +1744,6 @@
               </a:rPr>
               <a:t>Hadis Amin  </a:t>
             </a:r>
-            <a:pPr indent="0" marL="0">
-              <a:buNone/>
-            </a:pPr>
             <a:r>
               <a:rPr lang="en-US" sz="1250" dirty="0">
                 <a:solidFill>
@@ -1992,7 +1780,7 @@
           <a:bodyPr wrap="square" lIns="0" tIns="0" rIns="0" bIns="0" rtlCol="0" anchor="ctr"/>
           <a:lstStyle/>
           <a:p>
-            <a:pPr indent="0" marL="0">
+            <a:pPr marL="0" indent="0">
               <a:buNone/>
             </a:pPr>
             <a:r>
@@ -2006,9 +1794,6 @@
               </a:rPr>
               <a:t>Muhammad Rafif  </a:t>
             </a:r>
-            <a:pPr indent="0" marL="0">
-              <a:buNone/>
-            </a:pPr>
             <a:r>
               <a:rPr lang="en-US" sz="1250" dirty="0">
                 <a:solidFill>
@@ -2045,7 +1830,7 @@
           <a:bodyPr wrap="square" lIns="0" tIns="0" rIns="0" bIns="0" rtlCol="0" anchor="ctr"/>
           <a:lstStyle/>
           <a:p>
-            <a:pPr indent="0" marL="0">
+            <a:pPr marL="0" indent="0">
               <a:buNone/>
             </a:pPr>
             <a:r>
@@ -2059,9 +1844,6 @@
               </a:rPr>
               <a:t>Edwar Budiman  </a:t>
             </a:r>
-            <a:pPr indent="0" marL="0">
-              <a:buNone/>
-            </a:pPr>
             <a:r>
               <a:rPr lang="en-US" sz="1250" dirty="0">
                 <a:solidFill>
@@ -2071,7 +1853,7 @@
                 <a:ea typeface="Calibri" pitchFamily="34" charset="-122"/>
                 <a:cs typeface="Calibri" pitchFamily="34" charset="-120"/>
               </a:rPr>
-              <a:t>uXXXXXX</a:t>
+              <a:t>u7898974</a:t>
             </a:r>
             <a:endParaRPr lang="en-US" sz="1250" dirty="0"/>
           </a:p>
@@ -2098,7 +1880,7 @@
           <a:bodyPr wrap="square" lIns="0" tIns="0" rIns="0" bIns="0" rtlCol="0" anchor="ctr"/>
           <a:lstStyle/>
           <a:p>
-            <a:pPr indent="0" marL="0">
+            <a:pPr marL="0" indent="0">
               <a:buNone/>
             </a:pPr>
             <a:r>
@@ -2110,21 +1892,40 @@
                 <a:ea typeface="Calibri" pitchFamily="34" charset="-122"/>
                 <a:cs typeface="Calibri" pitchFamily="34" charset="-120"/>
               </a:rPr>
-              <a:t>Mukhit Onalbekov  </a:t>
-            </a:r>
-            <a:pPr indent="0" marL="0">
-              <a:buNone/>
-            </a:pPr>
-            <a:r>
-              <a:rPr lang="en-US" sz="1250" dirty="0">
-                <a:solidFill>
-                  <a:srgbClr val="9FB4BD"/>
+              <a:t>Mukhit </a:t>
+            </a:r>
+            <a:r>
+              <a:rPr lang="en-US" sz="1250" b="1" dirty="0" err="1">
+                <a:solidFill>
+                  <a:srgbClr val="FFFFFF"/>
                 </a:solidFill>
                 <a:latin typeface="Calibri" pitchFamily="34" charset="0"/>
                 <a:ea typeface="Calibri" pitchFamily="34" charset="-122"/>
                 <a:cs typeface="Calibri" pitchFamily="34" charset="-120"/>
               </a:rPr>
-              <a:t>uXXXXXX</a:t>
+              <a:t>Onalbekov</a:t>
+            </a:r>
+            <a:r>
+              <a:rPr lang="en-US" sz="1250" b="1" dirty="0">
+                <a:solidFill>
+                  <a:srgbClr val="FFFFFF"/>
+                </a:solidFill>
+                <a:latin typeface="Calibri" pitchFamily="34" charset="0"/>
+                <a:ea typeface="Calibri" pitchFamily="34" charset="-122"/>
+                <a:cs typeface="Calibri" pitchFamily="34" charset="-120"/>
+              </a:rPr>
+              <a:t>  </a:t>
+            </a:r>
+            <a:r>
+              <a:rPr lang="en-US" sz="1250" dirty="0">
+                <a:solidFill>
+                  <a:srgbClr val="9FB4BD"/>
+                </a:solidFill>
+                <a:latin typeface="Calibri" pitchFamily="34" charset="0"/>
+                <a:ea typeface="Calibri" pitchFamily="34" charset="-122"/>
+                <a:cs typeface="Calibri" pitchFamily="34" charset="-120"/>
+              </a:rPr>
+              <a:t>u7812910</a:t>
             </a:r>
             <a:endParaRPr lang="en-US" sz="1250" dirty="0"/>
           </a:p>
@@ -2151,7 +1952,7 @@
           <a:bodyPr wrap="square" lIns="0" tIns="0" rIns="0" bIns="0" rtlCol="0" anchor="ctr"/>
           <a:lstStyle/>
           <a:p>
-            <a:pPr indent="0" marL="0">
+            <a:pPr marL="0" indent="0">
               <a:buNone/>
             </a:pPr>
             <a:r>
@@ -2185,6 +1986,7 @@
         <a:solidFill>
           <a:srgbClr val="0E2233"/>
         </a:solidFill>
+        <a:effectLst/>
       </p:bgPr>
     </p:bg>
     <p:spTree>
@@ -2222,11 +2024,11 @@
           <a:bodyPr wrap="square" lIns="0" tIns="0" rIns="0" bIns="0" rtlCol="0" anchor="ctr"/>
           <a:lstStyle/>
           <a:p>
-            <a:pPr algn="l" indent="0" marL="0">
+            <a:pPr marL="0" indent="0" algn="l">
               <a:buNone/>
             </a:pPr>
             <a:r>
-              <a:rPr lang="en-US" sz="1100" b="1" spc="200" kern="0" dirty="0">
+              <a:rPr lang="en-US" sz="1100" b="1" kern="0" spc="200" dirty="0">
                 <a:solidFill>
                   <a:srgbClr val="0F8B8D"/>
                 </a:solidFill>
@@ -2261,7 +2063,7 @@
           <a:bodyPr wrap="square" lIns="0" tIns="0" rIns="0" bIns="0" rtlCol="0" anchor="ctr"/>
           <a:lstStyle/>
           <a:p>
-            <a:pPr indent="0" marL="0">
+            <a:pPr marL="0" indent="0">
               <a:buNone/>
             </a:pPr>
             <a:r>
@@ -2298,6 +2100,13 @@
           </a:solidFill>
           <a:ln/>
         </p:spPr>
+        <p:txBody>
+          <a:bodyPr/>
+          <a:lstStyle/>
+          <a:p>
+            <a:endParaRPr lang="en-AU"/>
+          </a:p>
+        </p:txBody>
       </p:sp>
       <p:sp>
         <p:nvSpPr>
@@ -2320,7 +2129,7 @@
           <a:bodyPr wrap="square" lIns="0" tIns="0" rIns="0" bIns="0" rtlCol="0" anchor="ctr"/>
           <a:lstStyle/>
           <a:p>
-            <a:pPr indent="0" marL="0">
+            <a:pPr marL="0" indent="0">
               <a:buNone/>
             </a:pPr>
             <a:r>
@@ -2359,7 +2168,7 @@
           <a:bodyPr wrap="square" lIns="0" tIns="0" rIns="0" bIns="0" rtlCol="0" anchor="ctr"/>
           <a:lstStyle/>
           <a:p>
-            <a:pPr indent="0" marL="0">
+            <a:pPr marL="0" indent="0">
               <a:buNone/>
             </a:pPr>
             <a:r>
@@ -2396,6 +2205,13 @@
           </a:solidFill>
           <a:ln/>
         </p:spPr>
+        <p:txBody>
+          <a:bodyPr/>
+          <a:lstStyle/>
+          <a:p>
+            <a:endParaRPr lang="en-AU"/>
+          </a:p>
+        </p:txBody>
       </p:sp>
       <p:sp>
         <p:nvSpPr>
@@ -2418,7 +2234,7 @@
           <a:bodyPr wrap="square" lIns="0" tIns="0" rIns="0" bIns="0" rtlCol="0" anchor="ctr"/>
           <a:lstStyle/>
           <a:p>
-            <a:pPr indent="0" marL="0">
+            <a:pPr marL="0" indent="0">
               <a:buNone/>
             </a:pPr>
             <a:r>
@@ -2457,7 +2273,7 @@
           <a:bodyPr wrap="square" lIns="0" tIns="0" rIns="0" bIns="0" rtlCol="0" anchor="ctr"/>
           <a:lstStyle/>
           <a:p>
-            <a:pPr indent="0" marL="0">
+            <a:pPr marL="0" indent="0">
               <a:buNone/>
             </a:pPr>
             <a:r>
@@ -2494,6 +2310,13 @@
           </a:solidFill>
           <a:ln/>
         </p:spPr>
+        <p:txBody>
+          <a:bodyPr/>
+          <a:lstStyle/>
+          <a:p>
+            <a:endParaRPr lang="en-AU"/>
+          </a:p>
+        </p:txBody>
       </p:sp>
       <p:sp>
         <p:nvSpPr>
@@ -2516,7 +2339,7 @@
           <a:bodyPr wrap="square" lIns="0" tIns="0" rIns="0" bIns="0" rtlCol="0" anchor="ctr"/>
           <a:lstStyle/>
           <a:p>
-            <a:pPr indent="0" marL="0">
+            <a:pPr marL="0" indent="0">
               <a:buNone/>
             </a:pPr>
             <a:r>
@@ -2555,7 +2378,7 @@
           <a:bodyPr wrap="square" lIns="0" tIns="0" rIns="0" bIns="0" rtlCol="0" anchor="ctr"/>
           <a:lstStyle/>
           <a:p>
-            <a:pPr indent="0" marL="0">
+            <a:pPr marL="0" indent="0">
               <a:buNone/>
             </a:pPr>
             <a:r>
@@ -2594,7 +2417,7 @@
           <a:bodyPr wrap="square" lIns="0" tIns="0" rIns="0" bIns="0" rtlCol="0" anchor="ctr"/>
           <a:lstStyle/>
           <a:p>
-            <a:pPr indent="0" marL="0">
+            <a:pPr marL="0" indent="0">
               <a:buNone/>
             </a:pPr>
             <a:r>
@@ -2628,6 +2451,7 @@
         <a:solidFill>
           <a:srgbClr val="FFFFFF"/>
         </a:solidFill>
+        <a:effectLst/>
       </p:bgPr>
     </p:bg>
     <p:spTree>
@@ -2665,11 +2489,11 @@
           <a:bodyPr wrap="square" lIns="0" tIns="0" rIns="0" bIns="0" rtlCol="0" anchor="ctr"/>
           <a:lstStyle/>
           <a:p>
-            <a:pPr algn="l" indent="0" marL="0">
+            <a:pPr marL="0" indent="0" algn="l">
               <a:buNone/>
             </a:pPr>
             <a:r>
-              <a:rPr lang="en-US" sz="1100" b="1" spc="200" kern="0" dirty="0">
+              <a:rPr lang="en-US" sz="1100" b="1" kern="0" spc="200" dirty="0">
                 <a:solidFill>
                   <a:srgbClr val="0F8B8D"/>
                 </a:solidFill>
@@ -2704,7 +2528,7 @@
           <a:bodyPr wrap="square" lIns="0" tIns="0" rIns="0" bIns="0" rtlCol="0" anchor="t"/>
           <a:lstStyle/>
           <a:p>
-            <a:pPr algn="l" indent="0" marL="0">
+            <a:pPr marL="0" indent="0" algn="l">
               <a:buNone/>
             </a:pPr>
             <a:r>
@@ -2743,7 +2567,7 @@
           <a:bodyPr wrap="square" lIns="0" tIns="0" rIns="0" bIns="0" rtlCol="0" anchor="ctr"/>
           <a:lstStyle/>
           <a:p>
-            <a:pPr indent="0" marL="0">
+            <a:pPr marL="0" indent="0">
               <a:lnSpc>
                 <a:spcPct val="115000"/>
               </a:lnSpc>
@@ -2760,12 +2584,6 @@
               </a:rPr>
               <a:t>MountainCar only succeeds by building momentum. We add a gentle, </a:t>
             </a:r>
-            <a:pPr indent="0" marL="0">
-              <a:lnSpc>
-                <a:spcPct val="115000"/>
-              </a:lnSpc>
-              <a:buNone/>
-            </a:pPr>
             <a:r>
               <a:rPr lang="en-US" sz="1500" b="1" dirty="0">
                 <a:solidFill>
@@ -2777,12 +2595,6 @@
               </a:rPr>
               <a:t>proportional cost</a:t>
             </a:r>
-            <a:pPr indent="0" marL="0">
-              <a:lnSpc>
-                <a:spcPct val="115000"/>
-              </a:lnSpc>
-              <a:buNone/>
-            </a:pPr>
             <a:r>
               <a:rPr lang="en-US" sz="1500" dirty="0">
                 <a:solidFill>
@@ -2824,6 +2636,13 @@
             <a:prstDash val="solid"/>
           </a:ln>
         </p:spPr>
+        <p:txBody>
+          <a:bodyPr/>
+          <a:lstStyle/>
+          <a:p>
+            <a:endParaRPr lang="en-AU"/>
+          </a:p>
+        </p:txBody>
       </p:sp>
       <p:sp>
         <p:nvSpPr>
@@ -2846,7 +2665,7 @@
           <a:bodyPr wrap="square" lIns="0" tIns="0" rIns="0" bIns="0" rtlCol="0" anchor="ctr"/>
           <a:lstStyle/>
           <a:p>
-            <a:pPr indent="0" marL="0">
+            <a:pPr marL="0" indent="0">
               <a:buNone/>
             </a:pPr>
             <a:r>
@@ -2860,9 +2679,6 @@
               </a:rPr>
               <a:t>cost rule   </a:t>
             </a:r>
-            <a:pPr indent="0" marL="0">
-              <a:buNone/>
-            </a:pPr>
             <a:r>
               <a:rPr lang="en-US" sz="1300" dirty="0">
                 <a:solidFill>
@@ -2904,6 +2720,13 @@
             <a:prstDash val="solid"/>
           </a:ln>
         </p:spPr>
+        <p:txBody>
+          <a:bodyPr/>
+          <a:lstStyle/>
+          <a:p>
+            <a:endParaRPr lang="en-AU"/>
+          </a:p>
+        </p:txBody>
       </p:sp>
       <p:sp>
         <p:nvSpPr>
@@ -2926,7 +2749,7 @@
           <a:bodyPr wrap="square" lIns="0" tIns="0" rIns="0" bIns="0" rtlCol="0" anchor="ctr"/>
           <a:lstStyle/>
           <a:p>
-            <a:pPr algn="ctr" indent="0" marL="0">
+            <a:pPr marL="0" indent="0" algn="ctr">
               <a:buNone/>
             </a:pPr>
             <a:r>
@@ -2970,6 +2793,13 @@
             <a:prstDash val="solid"/>
           </a:ln>
         </p:spPr>
+        <p:txBody>
+          <a:bodyPr/>
+          <a:lstStyle/>
+          <a:p>
+            <a:endParaRPr lang="en-AU"/>
+          </a:p>
+        </p:txBody>
       </p:sp>
       <p:sp>
         <p:nvSpPr>
@@ -2992,7 +2822,7 @@
           <a:bodyPr wrap="square" lIns="0" tIns="0" rIns="0" bIns="0" rtlCol="0" anchor="ctr"/>
           <a:lstStyle/>
           <a:p>
-            <a:pPr algn="ctr" indent="0" marL="0">
+            <a:pPr marL="0" indent="0" algn="ctr">
               <a:buNone/>
             </a:pPr>
             <a:r>
@@ -3036,6 +2866,13 @@
             <a:prstDash val="solid"/>
           </a:ln>
         </p:spPr>
+        <p:txBody>
+          <a:bodyPr/>
+          <a:lstStyle/>
+          <a:p>
+            <a:endParaRPr lang="en-AU"/>
+          </a:p>
+        </p:txBody>
       </p:sp>
       <p:sp>
         <p:nvSpPr>
@@ -3058,7 +2895,7 @@
           <a:bodyPr wrap="square" lIns="0" tIns="0" rIns="0" bIns="0" rtlCol="0" anchor="ctr"/>
           <a:lstStyle/>
           <a:p>
-            <a:pPr algn="ctr" indent="0" marL="0">
+            <a:pPr marL="0" indent="0" algn="ctr">
               <a:buNone/>
             </a:pPr>
             <a:r>
@@ -3100,13 +2937,20 @@
             <a:prstDash val="solid"/>
           </a:ln>
           <a:effectLst>
-            <a:outerShdw sx="100000" sy="100000" kx="0" ky="0" algn="bl" rotWithShape="0" blurRad="114300" dist="38100" dir="8100000">
+            <a:outerShdw blurRad="114300" dist="38100" dir="8100000" algn="bl" rotWithShape="0">
               <a:srgbClr val="9AA7AE">
                 <a:alpha val="25000"/>
               </a:srgbClr>
             </a:outerShdw>
           </a:effectLst>
         </p:spPr>
+        <p:txBody>
+          <a:bodyPr/>
+          <a:lstStyle/>
+          <a:p>
+            <a:endParaRPr lang="en-AU"/>
+          </a:p>
+        </p:txBody>
       </p:sp>
       <p:sp>
         <p:nvSpPr>
@@ -3127,6 +2971,13 @@
           </a:solidFill>
           <a:ln/>
         </p:spPr>
+        <p:txBody>
+          <a:bodyPr/>
+          <a:lstStyle/>
+          <a:p>
+            <a:endParaRPr lang="en-AU"/>
+          </a:p>
+        </p:txBody>
       </p:sp>
       <p:sp>
         <p:nvSpPr>
@@ -3149,7 +3000,7 @@
           <a:bodyPr wrap="square" lIns="0" tIns="0" rIns="0" bIns="0" rtlCol="0" anchor="ctr"/>
           <a:lstStyle/>
           <a:p>
-            <a:pPr algn="l" indent="0" marL="0">
+            <a:pPr marL="0" indent="0" algn="l">
               <a:buNone/>
             </a:pPr>
             <a:r>
@@ -3188,7 +3039,7 @@
           <a:bodyPr wrap="square" lIns="0" tIns="0" rIns="0" bIns="0" rtlCol="0" anchor="ctr"/>
           <a:lstStyle/>
           <a:p>
-            <a:pPr algn="l" indent="0" marL="0">
+            <a:pPr marL="0" indent="0" algn="l">
               <a:buNone/>
             </a:pPr>
             <a:r>
@@ -3230,13 +3081,20 @@
             <a:prstDash val="solid"/>
           </a:ln>
           <a:effectLst>
-            <a:outerShdw sx="100000" sy="100000" kx="0" ky="0" algn="bl" rotWithShape="0" blurRad="114300" dist="38100" dir="8100000">
+            <a:outerShdw blurRad="114300" dist="38100" dir="8100000" algn="bl" rotWithShape="0">
               <a:srgbClr val="9AA7AE">
                 <a:alpha val="25000"/>
               </a:srgbClr>
             </a:outerShdw>
           </a:effectLst>
         </p:spPr>
+        <p:txBody>
+          <a:bodyPr/>
+          <a:lstStyle/>
+          <a:p>
+            <a:endParaRPr lang="en-AU"/>
+          </a:p>
+        </p:txBody>
       </p:sp>
       <p:sp>
         <p:nvSpPr>
@@ -3257,6 +3115,13 @@
           </a:solidFill>
           <a:ln/>
         </p:spPr>
+        <p:txBody>
+          <a:bodyPr/>
+          <a:lstStyle/>
+          <a:p>
+            <a:endParaRPr lang="en-AU"/>
+          </a:p>
+        </p:txBody>
       </p:sp>
       <p:sp>
         <p:nvSpPr>
@@ -3279,7 +3144,7 @@
           <a:bodyPr wrap="square" lIns="0" tIns="0" rIns="0" bIns="0" rtlCol="0" anchor="ctr"/>
           <a:lstStyle/>
           <a:p>
-            <a:pPr algn="l" indent="0" marL="0">
+            <a:pPr marL="0" indent="0" algn="l">
               <a:buNone/>
             </a:pPr>
             <a:r>
@@ -3318,7 +3183,7 @@
           <a:bodyPr wrap="square" lIns="0" tIns="0" rIns="0" bIns="0" rtlCol="0" anchor="ctr"/>
           <a:lstStyle/>
           <a:p>
-            <a:pPr algn="l" indent="0" marL="0">
+            <a:pPr marL="0" indent="0" algn="l">
               <a:buNone/>
             </a:pPr>
             <a:r>
@@ -3357,7 +3222,7 @@
           <a:bodyPr wrap="square" lIns="0" tIns="0" rIns="0" bIns="0" rtlCol="0" anchor="ctr"/>
           <a:lstStyle/>
           <a:p>
-            <a:pPr indent="0" marL="0">
+            <a:pPr marL="0" indent="0">
               <a:buNone/>
             </a:pPr>
             <a:r>
@@ -3391,6 +3256,7 @@
         <a:solidFill>
           <a:srgbClr val="FFFFFF"/>
         </a:solidFill>
+        <a:effectLst/>
       </p:bgPr>
     </p:bg>
     <p:spTree>
@@ -3428,11 +3294,11 @@
           <a:bodyPr wrap="square" lIns="0" tIns="0" rIns="0" bIns="0" rtlCol="0" anchor="ctr"/>
           <a:lstStyle/>
           <a:p>
-            <a:pPr algn="l" indent="0" marL="0">
+            <a:pPr marL="0" indent="0" algn="l">
               <a:buNone/>
             </a:pPr>
             <a:r>
-              <a:rPr lang="en-US" sz="1100" b="1" spc="200" kern="0" dirty="0">
+              <a:rPr lang="en-US" sz="1100" b="1" kern="0" spc="200" dirty="0">
                 <a:solidFill>
                   <a:srgbClr val="0F8B8D"/>
                 </a:solidFill>
@@ -3467,7 +3333,7 @@
           <a:bodyPr wrap="square" lIns="0" tIns="0" rIns="0" bIns="0" rtlCol="0" anchor="t"/>
           <a:lstStyle/>
           <a:p>
-            <a:pPr algn="l" indent="0" marL="0">
+            <a:pPr marL="0" indent="0" algn="l">
               <a:buNone/>
             </a:pPr>
             <a:r>
@@ -3506,7 +3372,7 @@
           <a:bodyPr wrap="square" lIns="0" tIns="0" rIns="0" bIns="0" rtlCol="0" anchor="ctr"/>
           <a:lstStyle/>
           <a:p>
-            <a:pPr indent="0" marL="0">
+            <a:pPr marL="0" indent="0">
               <a:lnSpc>
                 <a:spcPct val="115000"/>
               </a:lnSpc>
@@ -3551,13 +3417,20 @@
             <a:prstDash val="solid"/>
           </a:ln>
           <a:effectLst>
-            <a:outerShdw sx="100000" sy="100000" kx="0" ky="0" algn="bl" rotWithShape="0" blurRad="114300" dist="38100" dir="8100000">
+            <a:outerShdw blurRad="114300" dist="38100" dir="8100000" algn="bl" rotWithShape="0">
               <a:srgbClr val="9AA7AE">
                 <a:alpha val="25000"/>
               </a:srgbClr>
             </a:outerShdw>
           </a:effectLst>
         </p:spPr>
+        <p:txBody>
+          <a:bodyPr/>
+          <a:lstStyle/>
+          <a:p>
+            <a:endParaRPr lang="en-AU"/>
+          </a:p>
+        </p:txBody>
       </p:sp>
       <p:sp>
         <p:nvSpPr>
@@ -3578,6 +3451,13 @@
           </a:solidFill>
           <a:ln/>
         </p:spPr>
+        <p:txBody>
+          <a:bodyPr/>
+          <a:lstStyle/>
+          <a:p>
+            <a:endParaRPr lang="en-AU"/>
+          </a:p>
+        </p:txBody>
       </p:sp>
       <p:sp>
         <p:nvSpPr>
@@ -3600,7 +3480,7 @@
           <a:bodyPr wrap="square" lIns="0" tIns="0" rIns="0" bIns="0" rtlCol="0" anchor="ctr"/>
           <a:lstStyle/>
           <a:p>
-            <a:pPr algn="l" indent="0" marL="0">
+            <a:pPr marL="0" indent="0" algn="l">
               <a:buNone/>
             </a:pPr>
             <a:r>
@@ -3639,7 +3519,7 @@
           <a:bodyPr wrap="square" lIns="0" tIns="0" rIns="0" bIns="0" rtlCol="0" anchor="ctr"/>
           <a:lstStyle/>
           <a:p>
-            <a:pPr algn="l" indent="0" marL="0">
+            <a:pPr marL="0" indent="0" algn="l">
               <a:buNone/>
             </a:pPr>
             <a:r>
@@ -3681,13 +3561,20 @@
             <a:prstDash val="solid"/>
           </a:ln>
           <a:effectLst>
-            <a:outerShdw sx="100000" sy="100000" kx="0" ky="0" algn="bl" rotWithShape="0" blurRad="114300" dist="38100" dir="8100000">
+            <a:outerShdw blurRad="114300" dist="38100" dir="8100000" algn="bl" rotWithShape="0">
               <a:srgbClr val="9AA7AE">
                 <a:alpha val="25000"/>
               </a:srgbClr>
             </a:outerShdw>
           </a:effectLst>
         </p:spPr>
+        <p:txBody>
+          <a:bodyPr/>
+          <a:lstStyle/>
+          <a:p>
+            <a:endParaRPr lang="en-AU"/>
+          </a:p>
+        </p:txBody>
       </p:sp>
       <p:sp>
         <p:nvSpPr>
@@ -3708,6 +3595,13 @@
           </a:solidFill>
           <a:ln/>
         </p:spPr>
+        <p:txBody>
+          <a:bodyPr/>
+          <a:lstStyle/>
+          <a:p>
+            <a:endParaRPr lang="en-AU"/>
+          </a:p>
+        </p:txBody>
       </p:sp>
       <p:sp>
         <p:nvSpPr>
@@ -3730,7 +3624,7 @@
           <a:bodyPr wrap="square" lIns="0" tIns="0" rIns="0" bIns="0" rtlCol="0" anchor="ctr"/>
           <a:lstStyle/>
           <a:p>
-            <a:pPr algn="l" indent="0" marL="0">
+            <a:pPr marL="0" indent="0" algn="l">
               <a:buNone/>
             </a:pPr>
             <a:r>
@@ -3769,7 +3663,7 @@
           <a:bodyPr wrap="square" lIns="0" tIns="0" rIns="0" bIns="0" rtlCol="0" anchor="ctr"/>
           <a:lstStyle/>
           <a:p>
-            <a:pPr algn="l" indent="0" marL="0">
+            <a:pPr marL="0" indent="0" algn="l">
               <a:buNone/>
             </a:pPr>
             <a:r>
@@ -3787,68 +3681,75 @@
           </a:p>
         </p:txBody>
       </p:sp>
+      <p:sp>
+        <p:nvSpPr>
+          <p:cNvPr id="14" name="Text 11"/>
+          <p:cNvSpPr/>
+          <p:nvPr/>
+        </p:nvSpPr>
+        <p:spPr>
+          <a:xfrm>
+            <a:off x="4526280" y="3840480"/>
+            <a:ext cx="4160520" cy="548640"/>
+          </a:xfrm>
+          <a:prstGeom prst="rect">
+            <a:avLst/>
+          </a:prstGeom>
+          <a:noFill/>
+          <a:ln/>
+        </p:spPr>
+        <p:txBody>
+          <a:bodyPr wrap="square" lIns="0" tIns="0" rIns="0" bIns="0" rtlCol="0" anchor="ctr"/>
+          <a:lstStyle/>
+          <a:p>
+            <a:pPr marL="0" indent="0" algn="ctr">
+              <a:buNone/>
+            </a:pPr>
+            <a:r>
+              <a:rPr lang="en-US" sz="1300" i="1" dirty="0">
+                <a:solidFill>
+                  <a:srgbClr val="6A7A86"/>
+                </a:solidFill>
+                <a:latin typeface="Calibri" pitchFamily="34" charset="0"/>
+                <a:ea typeface="Calibri" pitchFamily="34" charset="-122"/>
+                <a:cs typeface="Calibri" pitchFamily="34" charset="-120"/>
+              </a:rPr>
+              <a:t>Feasible — but thin. We should hit the budget, with little slack.</a:t>
+            </a:r>
+            <a:endParaRPr lang="en-US" sz="1300" dirty="0"/>
+          </a:p>
+        </p:txBody>
+      </p:sp>
       <p:pic>
         <p:nvPicPr>
-          <p:cNvPr id="13" name="Image 0" descr="img/cost_vs_speed_cap.png">    </p:cNvPr>
+          <p:cNvPr id="16" name="Picture 15">
+            <a:extLst>
+              <a:ext uri="{FF2B5EF4-FFF2-40B4-BE49-F238E27FC236}">
+                <a16:creationId xmlns:a16="http://schemas.microsoft.com/office/drawing/2014/main" id="{76EA0BB3-042B-0765-B8AF-487AAB133655}"/>
+              </a:ext>
+            </a:extLst>
+          </p:cNvPr>
           <p:cNvPicPr>
             <a:picLocks noChangeAspect="1"/>
           </p:cNvPicPr>
           <p:nvPr/>
         </p:nvPicPr>
         <p:blipFill>
-          <a:blip r:embed="rId1"/>
-          <a:srcRect l="0" r="0" t="0" b="0"/>
-          <a:stretch/>
+          <a:blip r:embed="rId3"/>
+          <a:stretch>
+            <a:fillRect/>
+          </a:stretch>
         </p:blipFill>
         <p:spPr>
           <a:xfrm>
-            <a:off x="4526280" y="1417320"/>
-            <a:ext cx="4160520" cy="2304288"/>
+            <a:off x="4622882" y="1475724"/>
+            <a:ext cx="4069080" cy="2252668"/>
           </a:xfrm>
           <a:prstGeom prst="rect">
             <a:avLst/>
           </a:prstGeom>
         </p:spPr>
       </p:pic>
-      <p:sp>
-        <p:nvSpPr>
-          <p:cNvPr id="14" name="Text 11"/>
-          <p:cNvSpPr/>
-          <p:nvPr/>
-        </p:nvSpPr>
-        <p:spPr>
-          <a:xfrm>
-            <a:off x="4526280" y="3840480"/>
-            <a:ext cx="4160520" cy="548640"/>
-          </a:xfrm>
-          <a:prstGeom prst="rect">
-            <a:avLst/>
-          </a:prstGeom>
-          <a:noFill/>
-          <a:ln/>
-        </p:spPr>
-        <p:txBody>
-          <a:bodyPr wrap="square" lIns="0" tIns="0" rIns="0" bIns="0" rtlCol="0" anchor="ctr"/>
-          <a:lstStyle/>
-          <a:p>
-            <a:pPr algn="ctr" indent="0" marL="0">
-              <a:buNone/>
-            </a:pPr>
-            <a:r>
-              <a:rPr lang="en-US" sz="1300" i="1" dirty="0">
-                <a:solidFill>
-                  <a:srgbClr val="6A7A86"/>
-                </a:solidFill>
-                <a:latin typeface="Calibri" pitchFamily="34" charset="0"/>
-                <a:ea typeface="Calibri" pitchFamily="34" charset="-122"/>
-                <a:cs typeface="Calibri" pitchFamily="34" charset="-120"/>
-              </a:rPr>
-              <a:t>Feasible — but thin. We should hit the budget, with little slack.</a:t>
-            </a:r>
-            <a:endParaRPr lang="en-US" sz="1300" dirty="0"/>
-          </a:p>
-        </p:txBody>
-      </p:sp>
     </p:spTree>
   </p:cSld>
   <p:clrMapOvr>
@@ -3865,6 +3766,7 @@
         <a:solidFill>
           <a:srgbClr val="FFFFFF"/>
         </a:solidFill>
+        <a:effectLst/>
       </p:bgPr>
     </p:bg>
     <p:spTree>
@@ -3902,11 +3804,11 @@
           <a:bodyPr wrap="square" lIns="0" tIns="0" rIns="0" bIns="0" rtlCol="0" anchor="ctr"/>
           <a:lstStyle/>
           <a:p>
-            <a:pPr algn="l" indent="0" marL="0">
+            <a:pPr marL="0" indent="0" algn="l">
               <a:buNone/>
             </a:pPr>
             <a:r>
-              <a:rPr lang="en-US" sz="1100" b="1" spc="200" kern="0" dirty="0">
+              <a:rPr lang="en-US" sz="1100" b="1" kern="0" spc="200" dirty="0">
                 <a:solidFill>
                   <a:srgbClr val="0F8B8D"/>
                 </a:solidFill>
@@ -3941,7 +3843,7 @@
           <a:bodyPr wrap="square" lIns="0" tIns="0" rIns="0" bIns="0" rtlCol="0" anchor="t"/>
           <a:lstStyle/>
           <a:p>
-            <a:pPr algn="l" indent="0" marL="0">
+            <a:pPr marL="0" indent="0" algn="l">
               <a:buNone/>
             </a:pPr>
             <a:r>
@@ -3980,6 +3882,13 @@
           </a:solidFill>
           <a:ln/>
         </p:spPr>
+        <p:txBody>
+          <a:bodyPr/>
+          <a:lstStyle/>
+          <a:p>
+            <a:endParaRPr lang="en-AU"/>
+          </a:p>
+        </p:txBody>
       </p:sp>
       <p:sp>
         <p:nvSpPr>
@@ -4002,7 +3911,7 @@
           <a:bodyPr wrap="square" lIns="0" tIns="0" rIns="0" bIns="0" rtlCol="0" anchor="ctr"/>
           <a:lstStyle/>
           <a:p>
-            <a:pPr algn="ctr" indent="0" marL="0">
+            <a:pPr marL="0" indent="0" algn="ctr">
               <a:buNone/>
             </a:pPr>
             <a:r>
@@ -4046,13 +3955,20 @@
             <a:prstDash val="solid"/>
           </a:ln>
           <a:effectLst>
-            <a:outerShdw sx="100000" sy="100000" kx="0" ky="0" algn="bl" rotWithShape="0" blurRad="114300" dist="38100" dir="8100000">
+            <a:outerShdw blurRad="114300" dist="38100" dir="8100000" algn="bl" rotWithShape="0">
               <a:srgbClr val="9AA7AE">
                 <a:alpha val="25000"/>
               </a:srgbClr>
             </a:outerShdw>
           </a:effectLst>
         </p:spPr>
+        <p:txBody>
+          <a:bodyPr/>
+          <a:lstStyle/>
+          <a:p>
+            <a:endParaRPr lang="en-AU"/>
+          </a:p>
+        </p:txBody>
       </p:sp>
       <p:sp>
         <p:nvSpPr>
@@ -4075,7 +3991,7 @@
           <a:bodyPr wrap="square" lIns="0" tIns="0" rIns="0" bIns="0" rtlCol="0" anchor="ctr"/>
           <a:lstStyle/>
           <a:p>
-            <a:pPr algn="ctr" indent="0" marL="0">
+            <a:pPr marL="0" indent="0" algn="ctr">
               <a:buNone/>
             </a:pPr>
             <a:r>
@@ -4119,13 +4035,20 @@
             <a:prstDash val="solid"/>
           </a:ln>
           <a:effectLst>
-            <a:outerShdw sx="100000" sy="100000" kx="0" ky="0" algn="bl" rotWithShape="0" blurRad="114300" dist="38100" dir="8100000">
+            <a:outerShdw blurRad="114300" dist="38100" dir="8100000" algn="bl" rotWithShape="0">
               <a:srgbClr val="9AA7AE">
                 <a:alpha val="25000"/>
               </a:srgbClr>
             </a:outerShdw>
           </a:effectLst>
         </p:spPr>
+        <p:txBody>
+          <a:bodyPr/>
+          <a:lstStyle/>
+          <a:p>
+            <a:endParaRPr lang="en-AU"/>
+          </a:p>
+        </p:txBody>
       </p:sp>
       <p:sp>
         <p:nvSpPr>
@@ -4148,7 +4071,7 @@
           <a:bodyPr wrap="square" lIns="0" tIns="0" rIns="0" bIns="0" rtlCol="0" anchor="ctr"/>
           <a:lstStyle/>
           <a:p>
-            <a:pPr algn="ctr" indent="0" marL="0">
+            <a:pPr marL="0" indent="0" algn="ctr">
               <a:buNone/>
             </a:pPr>
             <a:r>
@@ -4192,13 +4115,20 @@
             <a:prstDash val="solid"/>
           </a:ln>
           <a:effectLst>
-            <a:outerShdw sx="100000" sy="100000" kx="0" ky="0" algn="bl" rotWithShape="0" blurRad="114300" dist="38100" dir="8100000">
+            <a:outerShdw blurRad="114300" dist="38100" dir="8100000" algn="bl" rotWithShape="0">
               <a:srgbClr val="9AA7AE">
                 <a:alpha val="25000"/>
               </a:srgbClr>
             </a:outerShdw>
           </a:effectLst>
         </p:spPr>
+        <p:txBody>
+          <a:bodyPr/>
+          <a:lstStyle/>
+          <a:p>
+            <a:endParaRPr lang="en-AU"/>
+          </a:p>
+        </p:txBody>
       </p:sp>
       <p:sp>
         <p:nvSpPr>
@@ -4221,7 +4151,7 @@
           <a:bodyPr wrap="square" lIns="0" tIns="0" rIns="0" bIns="0" rtlCol="0" anchor="ctr"/>
           <a:lstStyle/>
           <a:p>
-            <a:pPr algn="ctr" indent="0" marL="0">
+            <a:pPr marL="0" indent="0" algn="ctr">
               <a:buNone/>
             </a:pPr>
             <a:r>
@@ -4261,6 +4191,13 @@
             <a:prstDash val="solid"/>
           </a:ln>
         </p:spPr>
+        <p:txBody>
+          <a:bodyPr/>
+          <a:lstStyle/>
+          <a:p>
+            <a:endParaRPr lang="en-AU"/>
+          </a:p>
+        </p:txBody>
       </p:sp>
       <p:sp>
         <p:nvSpPr>
@@ -4284,6 +4221,13 @@
             <a:prstDash val="solid"/>
           </a:ln>
         </p:spPr>
+        <p:txBody>
+          <a:bodyPr/>
+          <a:lstStyle/>
+          <a:p>
+            <a:endParaRPr lang="en-AU"/>
+          </a:p>
+        </p:txBody>
       </p:sp>
       <p:sp>
         <p:nvSpPr>
@@ -4307,6 +4251,13 @@
             <a:prstDash val="solid"/>
           </a:ln>
         </p:spPr>
+        <p:txBody>
+          <a:bodyPr/>
+          <a:lstStyle/>
+          <a:p>
+            <a:endParaRPr lang="en-AU"/>
+          </a:p>
+        </p:txBody>
       </p:sp>
       <p:sp>
         <p:nvSpPr>
@@ -4329,7 +4280,7 @@
           <a:bodyPr wrap="square" lIns="0" tIns="0" rIns="0" bIns="0" rtlCol="0" anchor="ctr"/>
           <a:lstStyle/>
           <a:p>
-            <a:pPr indent="0" marL="0">
+            <a:pPr marL="0" indent="0">
               <a:lnSpc>
                 <a:spcPct val="110000"/>
               </a:lnSpc>
@@ -4346,71 +4297,81 @@
               </a:rPr>
               <a:t>A second critic predicts </a:t>
             </a:r>
-            <a:pPr indent="0" marL="0">
+            <a:r>
+              <a:rPr lang="en-US" sz="1400" b="1" dirty="0">
+                <a:solidFill>
+                  <a:srgbClr val="C0392B"/>
+                </a:solidFill>
+                <a:latin typeface="Calibri" pitchFamily="34" charset="0"/>
+                <a:ea typeface="Calibri" pitchFamily="34" charset="-122"/>
+                <a:cs typeface="Calibri" pitchFamily="34" charset="-120"/>
+              </a:rPr>
+              <a:t>cost</a:t>
+            </a:r>
+            <a:r>
+              <a:rPr lang="en-US" sz="1400" dirty="0">
+                <a:solidFill>
+                  <a:srgbClr val="1B2B36"/>
+                </a:solidFill>
+                <a:latin typeface="Calibri" pitchFamily="34" charset="0"/>
+                <a:ea typeface="Calibri" pitchFamily="34" charset="-122"/>
+                <a:cs typeface="Calibri" pitchFamily="34" charset="-120"/>
+              </a:rPr>
+              <a:t>, alongside the usual reward critic.</a:t>
+            </a:r>
+            <a:endParaRPr lang="en-US" sz="1400" dirty="0"/>
+          </a:p>
+        </p:txBody>
+      </p:sp>
+      <p:sp>
+        <p:nvSpPr>
+          <p:cNvPr id="16" name="Text 14"/>
+          <p:cNvSpPr/>
+          <p:nvPr/>
+        </p:nvSpPr>
+        <p:spPr>
+          <a:xfrm>
+            <a:off x="4663440" y="2423160"/>
+            <a:ext cx="4023360" cy="914400"/>
+          </a:xfrm>
+          <a:prstGeom prst="rect">
+            <a:avLst/>
+          </a:prstGeom>
+          <a:noFill/>
+          <a:ln/>
+        </p:spPr>
+        <p:txBody>
+          <a:bodyPr wrap="square" lIns="0" tIns="0" rIns="0" bIns="0" rtlCol="0" anchor="ctr"/>
+          <a:lstStyle/>
+          <a:p>
+            <a:pPr marL="0" indent="0">
               <a:lnSpc>
                 <a:spcPct val="110000"/>
               </a:lnSpc>
               <a:buNone/>
             </a:pPr>
             <a:r>
-              <a:rPr lang="en-US" sz="1400" b="1" dirty="0">
-                <a:solidFill>
-                  <a:srgbClr val="C0392B"/>
+              <a:rPr lang="en-US" sz="1400" dirty="0">
+                <a:solidFill>
+                  <a:srgbClr val="1B2B36"/>
                 </a:solidFill>
                 <a:latin typeface="Calibri" pitchFamily="34" charset="0"/>
                 <a:ea typeface="Calibri" pitchFamily="34" charset="-122"/>
                 <a:cs typeface="Calibri" pitchFamily="34" charset="-120"/>
               </a:rPr>
-              <a:t>cost</a:t>
-            </a:r>
-            <a:pPr indent="0" marL="0">
-              <a:lnSpc>
-                <a:spcPct val="110000"/>
-              </a:lnSpc>
-              <a:buNone/>
-            </a:pPr>
-            <a:r>
-              <a:rPr lang="en-US" sz="1400" dirty="0">
-                <a:solidFill>
-                  <a:srgbClr val="1B2B36"/>
+              <a:t>One number, </a:t>
+            </a:r>
+            <a:r>
+              <a:rPr lang="en-US" sz="1400" b="1" dirty="0">
+                <a:solidFill>
+                  <a:srgbClr val="0F8B8D"/>
                 </a:solidFill>
                 <a:latin typeface="Calibri" pitchFamily="34" charset="0"/>
                 <a:ea typeface="Calibri" pitchFamily="34" charset="-122"/>
                 <a:cs typeface="Calibri" pitchFamily="34" charset="-120"/>
               </a:rPr>
-              <a:t>, alongside the usual reward critic.</a:t>
-            </a:r>
-            <a:endParaRPr lang="en-US" sz="1400" dirty="0"/>
-          </a:p>
-        </p:txBody>
-      </p:sp>
-      <p:sp>
-        <p:nvSpPr>
-          <p:cNvPr id="16" name="Text 14"/>
-          <p:cNvSpPr/>
-          <p:nvPr/>
-        </p:nvSpPr>
-        <p:spPr>
-          <a:xfrm>
-            <a:off x="4663440" y="2423160"/>
-            <a:ext cx="4023360" cy="914400"/>
-          </a:xfrm>
-          <a:prstGeom prst="rect">
-            <a:avLst/>
-          </a:prstGeom>
-          <a:noFill/>
-          <a:ln/>
-        </p:spPr>
-        <p:txBody>
-          <a:bodyPr wrap="square" lIns="0" tIns="0" rIns="0" bIns="0" rtlCol="0" anchor="ctr"/>
-          <a:lstStyle/>
-          <a:p>
-            <a:pPr indent="0" marL="0">
-              <a:lnSpc>
-                <a:spcPct val="110000"/>
-              </a:lnSpc>
-              <a:buNone/>
-            </a:pPr>
+              <a:t>λ</a:t>
+            </a:r>
             <a:r>
               <a:rPr lang="en-US" sz="1400" dirty="0">
                 <a:solidFill>
@@ -4420,31 +4381,19 @@
                 <a:ea typeface="Calibri" pitchFamily="34" charset="-122"/>
                 <a:cs typeface="Calibri" pitchFamily="34" charset="-120"/>
               </a:rPr>
-              <a:t>One number, </a:t>
-            </a:r>
-            <a:pPr indent="0" marL="0">
-              <a:lnSpc>
-                <a:spcPct val="110000"/>
-              </a:lnSpc>
-              <a:buNone/>
-            </a:pPr>
+              <a:t>, is a volume knob for safety: it turns </a:t>
+            </a:r>
             <a:r>
               <a:rPr lang="en-US" sz="1400" b="1" dirty="0">
                 <a:solidFill>
-                  <a:srgbClr val="0F8B8D"/>
+                  <a:srgbClr val="1B2B36"/>
                 </a:solidFill>
                 <a:latin typeface="Calibri" pitchFamily="34" charset="0"/>
                 <a:ea typeface="Calibri" pitchFamily="34" charset="-122"/>
                 <a:cs typeface="Calibri" pitchFamily="34" charset="-120"/>
               </a:rPr>
-              <a:t>λ</a:t>
-            </a:r>
-            <a:pPr indent="0" marL="0">
-              <a:lnSpc>
-                <a:spcPct val="110000"/>
-              </a:lnSpc>
-              <a:buNone/>
-            </a:pPr>
+              <a:t>up</a:t>
+            </a:r>
             <a:r>
               <a:rPr lang="en-US" sz="1400" dirty="0">
                 <a:solidFill>
@@ -4454,14 +4403,8 @@
                 <a:ea typeface="Calibri" pitchFamily="34" charset="-122"/>
                 <a:cs typeface="Calibri" pitchFamily="34" charset="-120"/>
               </a:rPr>
-              <a:t>, is a volume knob for safety: it turns </a:t>
-            </a:r>
-            <a:pPr indent="0" marL="0">
-              <a:lnSpc>
-                <a:spcPct val="110000"/>
-              </a:lnSpc>
-              <a:buNone/>
-            </a:pPr>
+              <a:t> when over budget, </a:t>
+            </a:r>
             <a:r>
               <a:rPr lang="en-US" sz="1400" b="1" dirty="0">
                 <a:solidFill>
@@ -4471,14 +4414,8 @@
                 <a:ea typeface="Calibri" pitchFamily="34" charset="-122"/>
                 <a:cs typeface="Calibri" pitchFamily="34" charset="-120"/>
               </a:rPr>
-              <a:t>up</a:t>
-            </a:r>
-            <a:pPr indent="0" marL="0">
-              <a:lnSpc>
-                <a:spcPct val="110000"/>
-              </a:lnSpc>
-              <a:buNone/>
-            </a:pPr>
+              <a:t>down</a:t>
+            </a:r>
             <a:r>
               <a:rPr lang="en-US" sz="1400" dirty="0">
                 <a:solidFill>
@@ -4488,40 +4425,6 @@
                 <a:ea typeface="Calibri" pitchFamily="34" charset="-122"/>
                 <a:cs typeface="Calibri" pitchFamily="34" charset="-120"/>
               </a:rPr>
-              <a:t> when over budget, </a:t>
-            </a:r>
-            <a:pPr indent="0" marL="0">
-              <a:lnSpc>
-                <a:spcPct val="110000"/>
-              </a:lnSpc>
-              <a:buNone/>
-            </a:pPr>
-            <a:r>
-              <a:rPr lang="en-US" sz="1400" b="1" dirty="0">
-                <a:solidFill>
-                  <a:srgbClr val="1B2B36"/>
-                </a:solidFill>
-                <a:latin typeface="Calibri" pitchFamily="34" charset="0"/>
-                <a:ea typeface="Calibri" pitchFamily="34" charset="-122"/>
-                <a:cs typeface="Calibri" pitchFamily="34" charset="-120"/>
-              </a:rPr>
-              <a:t>down</a:t>
-            </a:r>
-            <a:pPr indent="0" marL="0">
-              <a:lnSpc>
-                <a:spcPct val="110000"/>
-              </a:lnSpc>
-              <a:buNone/>
-            </a:pPr>
-            <a:r>
-              <a:rPr lang="en-US" sz="1400" dirty="0">
-                <a:solidFill>
-                  <a:srgbClr val="1B2B36"/>
-                </a:solidFill>
-                <a:latin typeface="Calibri" pitchFamily="34" charset="0"/>
-                <a:ea typeface="Calibri" pitchFamily="34" charset="-122"/>
-                <a:cs typeface="Calibri" pitchFamily="34" charset="-120"/>
-              </a:rPr>
               <a:t> when safe.</a:t>
             </a:r>
             <a:endParaRPr lang="en-US" sz="1400" dirty="0"/>
@@ -4549,7 +4452,7 @@
           <a:bodyPr wrap="square" lIns="0" tIns="0" rIns="0" bIns="0" rtlCol="0" anchor="ctr"/>
           <a:lstStyle/>
           <a:p>
-            <a:pPr indent="0" marL="0">
+            <a:pPr marL="0" indent="0">
               <a:buNone/>
             </a:pPr>
             <a:r>
@@ -4583,6 +4486,7 @@
         <a:solidFill>
           <a:srgbClr val="FFFFFF"/>
         </a:solidFill>
+        <a:effectLst/>
       </p:bgPr>
     </p:bg>
     <p:spTree>
@@ -4620,11 +4524,11 @@
           <a:bodyPr wrap="square" lIns="0" tIns="0" rIns="0" bIns="0" rtlCol="0" anchor="ctr"/>
           <a:lstStyle/>
           <a:p>
-            <a:pPr algn="l" indent="0" marL="0">
+            <a:pPr marL="0" indent="0" algn="l">
               <a:buNone/>
             </a:pPr>
             <a:r>
-              <a:rPr lang="en-US" sz="1100" b="1" spc="200" kern="0" dirty="0">
+              <a:rPr lang="en-US" sz="1100" b="1" kern="0" spc="200" dirty="0">
                 <a:solidFill>
                   <a:srgbClr val="0F8B8D"/>
                 </a:solidFill>
@@ -4659,7 +4563,7 @@
           <a:bodyPr wrap="square" lIns="0" tIns="0" rIns="0" bIns="0" rtlCol="0" anchor="t"/>
           <a:lstStyle/>
           <a:p>
-            <a:pPr algn="l" indent="0" marL="0">
+            <a:pPr marL="0" indent="0" algn="l">
               <a:buNone/>
             </a:pPr>
             <a:r>
@@ -4693,17 +4597,41 @@
         </p:nvGraphicFramePr>
         <p:xfrm>
           <a:off x="502920" y="1417320"/>
-          <a:ext cx="3931920" cy="914400"/>
+          <a:ext cx="3931920" cy="2176272"/>
         </p:xfrm>
         <a:graphic>
           <a:graphicData uri="http://schemas.openxmlformats.org/drawingml/2006/table">
             <a:tbl>
               <a:tblPr/>
               <a:tblGrid>
-                <a:gridCol w="914400"/>
-                <a:gridCol w="1097280"/>
-                <a:gridCol w="960120"/>
-                <a:gridCol w="960120"/>
+                <a:gridCol w="914400">
+                  <a:extLst>
+                    <a:ext uri="{9D8B030D-6E8A-4147-A177-3AD203B41FA5}">
+                      <a16:colId xmlns:a16="http://schemas.microsoft.com/office/drawing/2014/main" val="20000"/>
+                    </a:ext>
+                  </a:extLst>
+                </a:gridCol>
+                <a:gridCol w="1097280">
+                  <a:extLst>
+                    <a:ext uri="{9D8B030D-6E8A-4147-A177-3AD203B41FA5}">
+                      <a16:colId xmlns:a16="http://schemas.microsoft.com/office/drawing/2014/main" val="20001"/>
+                    </a:ext>
+                  </a:extLst>
+                </a:gridCol>
+                <a:gridCol w="960120">
+                  <a:extLst>
+                    <a:ext uri="{9D8B030D-6E8A-4147-A177-3AD203B41FA5}">
+                      <a16:colId xmlns:a16="http://schemas.microsoft.com/office/drawing/2014/main" val="20002"/>
+                    </a:ext>
+                  </a:extLst>
+                </a:gridCol>
+                <a:gridCol w="960120">
+                  <a:extLst>
+                    <a:ext uri="{9D8B030D-6E8A-4147-A177-3AD203B41FA5}">
+                      <a16:colId xmlns:a16="http://schemas.microsoft.com/office/drawing/2014/main" val="20003"/>
+                    </a:ext>
+                  </a:extLst>
+                </a:gridCol>
               </a:tblGrid>
               <a:tr h="310896">
                 <a:tc>
@@ -4711,7 +4639,7 @@
                     <a:bodyPr/>
                     <a:lstStyle/>
                     <a:p>
-                      <a:pPr algn="ctr" indent="0" marL="0">
+                      <a:pPr marL="0" indent="0" algn="ctr">
                         <a:buNone/>
                       </a:pPr>
                       <a:r>
@@ -4732,7 +4660,7 @@
                       </a:endParaRPr>
                     </a:p>
                   </a:txBody>
-                  <a:tcPr marL="91440" marR="91440" marT="45720" marB="45720" anchor="ctr">
+                  <a:tcPr anchor="ctr">
                     <a:lnL w="6350" cap="flat" cmpd="sng" algn="ctr">
                       <a:solidFill>
                         <a:srgbClr val="D8E0E4"/>
@@ -4779,7 +4707,7 @@
                     <a:bodyPr/>
                     <a:lstStyle/>
                     <a:p>
-                      <a:pPr algn="ctr" indent="0" marL="0">
+                      <a:pPr marL="0" indent="0" algn="ctr">
                         <a:buNone/>
                       </a:pPr>
                       <a:r>
@@ -4800,7 +4728,7 @@
                       </a:endParaRPr>
                     </a:p>
                   </a:txBody>
-                  <a:tcPr marL="91440" marR="91440" marT="45720" marB="45720" anchor="ctr">
+                  <a:tcPr anchor="ctr">
                     <a:lnL w="6350" cap="flat" cmpd="sng" algn="ctr">
                       <a:solidFill>
                         <a:srgbClr val="D8E0E4"/>
@@ -4847,7 +4775,7 @@
                     <a:bodyPr/>
                     <a:lstStyle/>
                     <a:p>
-                      <a:pPr algn="ctr" indent="0" marL="0">
+                      <a:pPr marL="0" indent="0" algn="ctr">
                         <a:buNone/>
                       </a:pPr>
                       <a:r>
@@ -4868,7 +4796,7 @@
                       </a:endParaRPr>
                     </a:p>
                   </a:txBody>
-                  <a:tcPr marL="91440" marR="91440" marT="45720" marB="45720" anchor="ctr">
+                  <a:tcPr anchor="ctr">
                     <a:lnL w="6350" cap="flat" cmpd="sng" algn="ctr">
                       <a:solidFill>
                         <a:srgbClr val="D8E0E4"/>
@@ -4915,7 +4843,7 @@
                     <a:bodyPr/>
                     <a:lstStyle/>
                     <a:p>
-                      <a:pPr algn="ctr" indent="0" marL="0">
+                      <a:pPr marL="0" indent="0" algn="ctr">
                         <a:buNone/>
                       </a:pPr>
                       <a:r>
@@ -4936,7 +4864,7 @@
                       </a:endParaRPr>
                     </a:p>
                   </a:txBody>
-                  <a:tcPr marL="91440" marR="91440" marT="45720" marB="45720" anchor="ctr">
+                  <a:tcPr anchor="ctr">
                     <a:lnL w="6350" cap="flat" cmpd="sng" algn="ctr">
                       <a:solidFill>
                         <a:srgbClr val="D8E0E4"/>
@@ -4978,6 +4906,11 @@
                     </a:solidFill>
                   </a:tcPr>
                 </a:tc>
+                <a:extLst>
+                  <a:ext uri="{0D108BD9-81ED-4DB2-BD59-A6C34878D82A}">
+                    <a16:rowId xmlns:a16="http://schemas.microsoft.com/office/drawing/2014/main" val="10000"/>
+                  </a:ext>
+                </a:extLst>
               </a:tr>
               <a:tr h="310896">
                 <a:tc>
@@ -4985,7 +4918,7 @@
                     <a:bodyPr/>
                     <a:lstStyle/>
                     <a:p>
-                      <a:pPr algn="ctr" indent="0" marL="0">
+                      <a:pPr marL="0" indent="0" algn="ctr">
                         <a:buNone/>
                       </a:pPr>
                       <a:r>
@@ -5006,7 +4939,7 @@
                       </a:endParaRPr>
                     </a:p>
                   </a:txBody>
-                  <a:tcPr marL="91440" marR="91440" marT="45720" marB="45720" anchor="ctr">
+                  <a:tcPr anchor="ctr">
                     <a:lnL w="6350" cap="flat" cmpd="sng" algn="ctr">
                       <a:solidFill>
                         <a:srgbClr val="D8E0E4"/>
@@ -5050,7 +4983,7 @@
                     <a:bodyPr/>
                     <a:lstStyle/>
                     <a:p>
-                      <a:pPr algn="ctr" indent="0" marL="0">
+                      <a:pPr marL="0" indent="0" algn="ctr">
                         <a:buNone/>
                       </a:pPr>
                       <a:r>
@@ -5071,7 +5004,7 @@
                       </a:endParaRPr>
                     </a:p>
                   </a:txBody>
-                  <a:tcPr marL="91440" marR="91440" marT="45720" marB="45720" anchor="ctr">
+                  <a:tcPr anchor="ctr">
                     <a:lnL w="6350" cap="flat" cmpd="sng" algn="ctr">
                       <a:solidFill>
                         <a:srgbClr val="D8E0E4"/>
@@ -5115,7 +5048,7 @@
                     <a:bodyPr/>
                     <a:lstStyle/>
                     <a:p>
-                      <a:pPr algn="ctr" indent="0" marL="0">
+                      <a:pPr marL="0" indent="0" algn="ctr">
                         <a:buNone/>
                       </a:pPr>
                       <a:r>
@@ -5136,7 +5069,7 @@
                       </a:endParaRPr>
                     </a:p>
                   </a:txBody>
-                  <a:tcPr marL="91440" marR="91440" marT="45720" marB="45720" anchor="ctr">
+                  <a:tcPr anchor="ctr">
                     <a:lnL w="6350" cap="flat" cmpd="sng" algn="ctr">
                       <a:solidFill>
                         <a:srgbClr val="D8E0E4"/>
@@ -5180,7 +5113,7 @@
                     <a:bodyPr/>
                     <a:lstStyle/>
                     <a:p>
-                      <a:pPr algn="ctr" indent="0" marL="0">
+                      <a:pPr marL="0" indent="0" algn="ctr">
                         <a:buNone/>
                       </a:pPr>
                       <a:r>
@@ -5201,7 +5134,7 @@
                       </a:endParaRPr>
                     </a:p>
                   </a:txBody>
-                  <a:tcPr marL="91440" marR="91440" marT="45720" marB="45720" anchor="ctr">
+                  <a:tcPr anchor="ctr">
                     <a:lnL w="6350" cap="flat" cmpd="sng" algn="ctr">
                       <a:solidFill>
                         <a:srgbClr val="D8E0E4"/>
@@ -5240,6 +5173,11 @@
                     </a:lnB>
                   </a:tcPr>
                 </a:tc>
+                <a:extLst>
+                  <a:ext uri="{0D108BD9-81ED-4DB2-BD59-A6C34878D82A}">
+                    <a16:rowId xmlns:a16="http://schemas.microsoft.com/office/drawing/2014/main" val="10001"/>
+                  </a:ext>
+                </a:extLst>
               </a:tr>
               <a:tr h="310896">
                 <a:tc>
@@ -5247,7 +5185,7 @@
                     <a:bodyPr/>
                     <a:lstStyle/>
                     <a:p>
-                      <a:pPr algn="ctr" indent="0" marL="0">
+                      <a:pPr marL="0" indent="0" algn="ctr">
                         <a:buNone/>
                       </a:pPr>
                       <a:r>
@@ -5268,7 +5206,7 @@
                       </a:endParaRPr>
                     </a:p>
                   </a:txBody>
-                  <a:tcPr marL="91440" marR="91440" marT="45720" marB="45720" anchor="ctr">
+                  <a:tcPr anchor="ctr">
                     <a:lnL w="6350" cap="flat" cmpd="sng" algn="ctr">
                       <a:solidFill>
                         <a:srgbClr val="D8E0E4"/>
@@ -5312,7 +5250,7 @@
                     <a:bodyPr/>
                     <a:lstStyle/>
                     <a:p>
-                      <a:pPr algn="ctr" indent="0" marL="0">
+                      <a:pPr marL="0" indent="0" algn="ctr">
                         <a:buNone/>
                       </a:pPr>
                       <a:r>
@@ -5333,7 +5271,7 @@
                       </a:endParaRPr>
                     </a:p>
                   </a:txBody>
-                  <a:tcPr marL="91440" marR="91440" marT="45720" marB="45720" anchor="ctr">
+                  <a:tcPr anchor="ctr">
                     <a:lnL w="6350" cap="flat" cmpd="sng" algn="ctr">
                       <a:solidFill>
                         <a:srgbClr val="D8E0E4"/>
@@ -5377,7 +5315,7 @@
                     <a:bodyPr/>
                     <a:lstStyle/>
                     <a:p>
-                      <a:pPr algn="ctr" indent="0" marL="0">
+                      <a:pPr marL="0" indent="0" algn="ctr">
                         <a:buNone/>
                       </a:pPr>
                       <a:r>
@@ -5398,7 +5336,7 @@
                       </a:endParaRPr>
                     </a:p>
                   </a:txBody>
-                  <a:tcPr marL="91440" marR="91440" marT="45720" marB="45720" anchor="ctr">
+                  <a:tcPr anchor="ctr">
                     <a:lnL w="6350" cap="flat" cmpd="sng" algn="ctr">
                       <a:solidFill>
                         <a:srgbClr val="D8E0E4"/>
@@ -5442,7 +5380,7 @@
                     <a:bodyPr/>
                     <a:lstStyle/>
                     <a:p>
-                      <a:pPr algn="ctr" indent="0" marL="0">
+                      <a:pPr marL="0" indent="0" algn="ctr">
                         <a:buNone/>
                       </a:pPr>
                       <a:r>
@@ -5463,7 +5401,7 @@
                       </a:endParaRPr>
                     </a:p>
                   </a:txBody>
-                  <a:tcPr marL="91440" marR="91440" marT="45720" marB="45720" anchor="ctr">
+                  <a:tcPr anchor="ctr">
                     <a:lnL w="6350" cap="flat" cmpd="sng" algn="ctr">
                       <a:solidFill>
                         <a:srgbClr val="D8E0E4"/>
@@ -5502,6 +5440,11 @@
                     </a:lnB>
                   </a:tcPr>
                 </a:tc>
+                <a:extLst>
+                  <a:ext uri="{0D108BD9-81ED-4DB2-BD59-A6C34878D82A}">
+                    <a16:rowId xmlns:a16="http://schemas.microsoft.com/office/drawing/2014/main" val="10002"/>
+                  </a:ext>
+                </a:extLst>
               </a:tr>
               <a:tr h="310896">
                 <a:tc>
@@ -5509,7 +5452,7 @@
                     <a:bodyPr/>
                     <a:lstStyle/>
                     <a:p>
-                      <a:pPr algn="ctr" indent="0" marL="0">
+                      <a:pPr marL="0" indent="0" algn="ctr">
                         <a:buNone/>
                       </a:pPr>
                       <a:r>
@@ -5530,7 +5473,7 @@
                       </a:endParaRPr>
                     </a:p>
                   </a:txBody>
-                  <a:tcPr marL="91440" marR="91440" marT="45720" marB="45720" anchor="ctr">
+                  <a:tcPr anchor="ctr">
                     <a:lnL w="6350" cap="flat" cmpd="sng" algn="ctr">
                       <a:solidFill>
                         <a:srgbClr val="D8E0E4"/>
@@ -5574,7 +5517,7 @@
                     <a:bodyPr/>
                     <a:lstStyle/>
                     <a:p>
-                      <a:pPr algn="ctr" indent="0" marL="0">
+                      <a:pPr marL="0" indent="0" algn="ctr">
                         <a:buNone/>
                       </a:pPr>
                       <a:r>
@@ -5595,7 +5538,7 @@
                       </a:endParaRPr>
                     </a:p>
                   </a:txBody>
-                  <a:tcPr marL="91440" marR="91440" marT="45720" marB="45720" anchor="ctr">
+                  <a:tcPr anchor="ctr">
                     <a:lnL w="6350" cap="flat" cmpd="sng" algn="ctr">
                       <a:solidFill>
                         <a:srgbClr val="D8E0E4"/>
@@ -5639,7 +5582,7 @@
                     <a:bodyPr/>
                     <a:lstStyle/>
                     <a:p>
-                      <a:pPr algn="ctr" indent="0" marL="0">
+                      <a:pPr marL="0" indent="0" algn="ctr">
                         <a:buNone/>
                       </a:pPr>
                       <a:r>
@@ -5660,7 +5603,7 @@
                       </a:endParaRPr>
                     </a:p>
                   </a:txBody>
-                  <a:tcPr marL="91440" marR="91440" marT="45720" marB="45720" anchor="ctr">
+                  <a:tcPr anchor="ctr">
                     <a:lnL w="6350" cap="flat" cmpd="sng" algn="ctr">
                       <a:solidFill>
                         <a:srgbClr val="D8E0E4"/>
@@ -5704,7 +5647,7 @@
                     <a:bodyPr/>
                     <a:lstStyle/>
                     <a:p>
-                      <a:pPr algn="ctr" indent="0" marL="0">
+                      <a:pPr marL="0" indent="0" algn="ctr">
                         <a:buNone/>
                       </a:pPr>
                       <a:r>
@@ -5725,7 +5668,7 @@
                       </a:endParaRPr>
                     </a:p>
                   </a:txBody>
-                  <a:tcPr marL="91440" marR="91440" marT="45720" marB="45720" anchor="ctr">
+                  <a:tcPr anchor="ctr">
                     <a:lnL w="6350" cap="flat" cmpd="sng" algn="ctr">
                       <a:solidFill>
                         <a:srgbClr val="D8E0E4"/>
@@ -5764,6 +5707,11 @@
                     </a:lnB>
                   </a:tcPr>
                 </a:tc>
+                <a:extLst>
+                  <a:ext uri="{0D108BD9-81ED-4DB2-BD59-A6C34878D82A}">
+                    <a16:rowId xmlns:a16="http://schemas.microsoft.com/office/drawing/2014/main" val="10003"/>
+                  </a:ext>
+                </a:extLst>
               </a:tr>
               <a:tr h="310896">
                 <a:tc>
@@ -5771,7 +5719,7 @@
                     <a:bodyPr/>
                     <a:lstStyle/>
                     <a:p>
-                      <a:pPr algn="ctr" indent="0" marL="0">
+                      <a:pPr marL="0" indent="0" algn="ctr">
                         <a:buNone/>
                       </a:pPr>
                       <a:r>
@@ -5792,7 +5740,7 @@
                       </a:endParaRPr>
                     </a:p>
                   </a:txBody>
-                  <a:tcPr marL="91440" marR="91440" marT="45720" marB="45720" anchor="ctr">
+                  <a:tcPr anchor="ctr">
                     <a:lnL w="6350" cap="flat" cmpd="sng" algn="ctr">
                       <a:solidFill>
                         <a:srgbClr val="D8E0E4"/>
@@ -5836,7 +5784,7 @@
                     <a:bodyPr/>
                     <a:lstStyle/>
                     <a:p>
-                      <a:pPr algn="ctr" indent="0" marL="0">
+                      <a:pPr marL="0" indent="0" algn="ctr">
                         <a:buNone/>
                       </a:pPr>
                       <a:r>
@@ -5857,7 +5805,7 @@
                       </a:endParaRPr>
                     </a:p>
                   </a:txBody>
-                  <a:tcPr marL="91440" marR="91440" marT="45720" marB="45720" anchor="ctr">
+                  <a:tcPr anchor="ctr">
                     <a:lnL w="6350" cap="flat" cmpd="sng" algn="ctr">
                       <a:solidFill>
                         <a:srgbClr val="D8E0E4"/>
@@ -5901,7 +5849,7 @@
                     <a:bodyPr/>
                     <a:lstStyle/>
                     <a:p>
-                      <a:pPr algn="ctr" indent="0" marL="0">
+                      <a:pPr marL="0" indent="0" algn="ctr">
                         <a:buNone/>
                       </a:pPr>
                       <a:r>
@@ -5922,7 +5870,7 @@
                       </a:endParaRPr>
                     </a:p>
                   </a:txBody>
-                  <a:tcPr marL="91440" marR="91440" marT="45720" marB="45720" anchor="ctr">
+                  <a:tcPr anchor="ctr">
                     <a:lnL w="6350" cap="flat" cmpd="sng" algn="ctr">
                       <a:solidFill>
                         <a:srgbClr val="D8E0E4"/>
@@ -5966,7 +5914,7 @@
                     <a:bodyPr/>
                     <a:lstStyle/>
                     <a:p>
-                      <a:pPr algn="ctr" indent="0" marL="0">
+                      <a:pPr marL="0" indent="0" algn="ctr">
                         <a:buNone/>
                       </a:pPr>
                       <a:r>
@@ -5987,7 +5935,7 @@
                       </a:endParaRPr>
                     </a:p>
                   </a:txBody>
-                  <a:tcPr marL="91440" marR="91440" marT="45720" marB="45720" anchor="ctr">
+                  <a:tcPr anchor="ctr">
                     <a:lnL w="6350" cap="flat" cmpd="sng" algn="ctr">
                       <a:solidFill>
                         <a:srgbClr val="D8E0E4"/>
@@ -6026,6 +5974,11 @@
                     </a:lnB>
                   </a:tcPr>
                 </a:tc>
+                <a:extLst>
+                  <a:ext uri="{0D108BD9-81ED-4DB2-BD59-A6C34878D82A}">
+                    <a16:rowId xmlns:a16="http://schemas.microsoft.com/office/drawing/2014/main" val="10004"/>
+                  </a:ext>
+                </a:extLst>
               </a:tr>
               <a:tr h="310896">
                 <a:tc>
@@ -6033,7 +5986,7 @@
                     <a:bodyPr/>
                     <a:lstStyle/>
                     <a:p>
-                      <a:pPr algn="ctr" indent="0" marL="0">
+                      <a:pPr marL="0" indent="0" algn="ctr">
                         <a:buNone/>
                       </a:pPr>
                       <a:r>
@@ -6054,7 +6007,7 @@
                       </a:endParaRPr>
                     </a:p>
                   </a:txBody>
-                  <a:tcPr marL="91440" marR="91440" marT="45720" marB="45720" anchor="ctr">
+                  <a:tcPr anchor="ctr">
                     <a:lnL w="6350" cap="flat" cmpd="sng" algn="ctr">
                       <a:solidFill>
                         <a:srgbClr val="D8E0E4"/>
@@ -6098,7 +6051,7 @@
                     <a:bodyPr/>
                     <a:lstStyle/>
                     <a:p>
-                      <a:pPr algn="ctr" indent="0" marL="0">
+                      <a:pPr marL="0" indent="0" algn="ctr">
                         <a:buNone/>
                       </a:pPr>
                       <a:r>
@@ -6119,7 +6072,7 @@
                       </a:endParaRPr>
                     </a:p>
                   </a:txBody>
-                  <a:tcPr marL="91440" marR="91440" marT="45720" marB="45720" anchor="ctr">
+                  <a:tcPr anchor="ctr">
                     <a:lnL w="6350" cap="flat" cmpd="sng" algn="ctr">
                       <a:solidFill>
                         <a:srgbClr val="D8E0E4"/>
@@ -6163,7 +6116,7 @@
                     <a:bodyPr/>
                     <a:lstStyle/>
                     <a:p>
-                      <a:pPr algn="ctr" indent="0" marL="0">
+                      <a:pPr marL="0" indent="0" algn="ctr">
                         <a:buNone/>
                       </a:pPr>
                       <a:r>
@@ -6184,7 +6137,7 @@
                       </a:endParaRPr>
                     </a:p>
                   </a:txBody>
-                  <a:tcPr marL="91440" marR="91440" marT="45720" marB="45720" anchor="ctr">
+                  <a:tcPr anchor="ctr">
                     <a:lnL w="6350" cap="flat" cmpd="sng" algn="ctr">
                       <a:solidFill>
                         <a:srgbClr val="D8E0E4"/>
@@ -6228,7 +6181,7 @@
                     <a:bodyPr/>
                     <a:lstStyle/>
                     <a:p>
-                      <a:pPr algn="ctr" indent="0" marL="0">
+                      <a:pPr marL="0" indent="0" algn="ctr">
                         <a:buNone/>
                       </a:pPr>
                       <a:r>
@@ -6249,7 +6202,7 @@
                       </a:endParaRPr>
                     </a:p>
                   </a:txBody>
-                  <a:tcPr marL="91440" marR="91440" marT="45720" marB="45720" anchor="ctr">
+                  <a:tcPr anchor="ctr">
                     <a:lnL w="6350" cap="flat" cmpd="sng" algn="ctr">
                       <a:solidFill>
                         <a:srgbClr val="D8E0E4"/>
@@ -6288,6 +6241,11 @@
                     </a:lnB>
                   </a:tcPr>
                 </a:tc>
+                <a:extLst>
+                  <a:ext uri="{0D108BD9-81ED-4DB2-BD59-A6C34878D82A}">
+                    <a16:rowId xmlns:a16="http://schemas.microsoft.com/office/drawing/2014/main" val="10005"/>
+                  </a:ext>
+                </a:extLst>
               </a:tr>
               <a:tr h="310896">
                 <a:tc>
@@ -6295,7 +6253,7 @@
                     <a:bodyPr/>
                     <a:lstStyle/>
                     <a:p>
-                      <a:pPr algn="ctr" indent="0" marL="0">
+                      <a:pPr marL="0" indent="0" algn="ctr">
                         <a:buNone/>
                       </a:pPr>
                       <a:r>
@@ -6316,7 +6274,7 @@
                       </a:endParaRPr>
                     </a:p>
                   </a:txBody>
-                  <a:tcPr marL="91440" marR="91440" marT="45720" marB="45720" anchor="ctr">
+                  <a:tcPr anchor="ctr">
                     <a:lnL w="6350" cap="flat" cmpd="sng" algn="ctr">
                       <a:solidFill>
                         <a:srgbClr val="D8E0E4"/>
@@ -6360,7 +6318,7 @@
                     <a:bodyPr/>
                     <a:lstStyle/>
                     <a:p>
-                      <a:pPr algn="ctr" indent="0" marL="0">
+                      <a:pPr marL="0" indent="0" algn="ctr">
                         <a:buNone/>
                       </a:pPr>
                       <a:r>
@@ -6381,7 +6339,7 @@
                       </a:endParaRPr>
                     </a:p>
                   </a:txBody>
-                  <a:tcPr marL="91440" marR="91440" marT="45720" marB="45720" anchor="ctr">
+                  <a:tcPr anchor="ctr">
                     <a:lnL w="6350" cap="flat" cmpd="sng" algn="ctr">
                       <a:solidFill>
                         <a:srgbClr val="D8E0E4"/>
@@ -6425,7 +6383,7 @@
                     <a:bodyPr/>
                     <a:lstStyle/>
                     <a:p>
-                      <a:pPr algn="ctr" indent="0" marL="0">
+                      <a:pPr marL="0" indent="0" algn="ctr">
                         <a:buNone/>
                       </a:pPr>
                       <a:r>
@@ -6446,7 +6404,7 @@
                       </a:endParaRPr>
                     </a:p>
                   </a:txBody>
-                  <a:tcPr marL="91440" marR="91440" marT="45720" marB="45720" anchor="ctr">
+                  <a:tcPr anchor="ctr">
                     <a:lnL w="6350" cap="flat" cmpd="sng" algn="ctr">
                       <a:solidFill>
                         <a:srgbClr val="D8E0E4"/>
@@ -6490,7 +6448,7 @@
                     <a:bodyPr/>
                     <a:lstStyle/>
                     <a:p>
-                      <a:pPr algn="ctr" indent="0" marL="0">
+                      <a:pPr marL="0" indent="0" algn="ctr">
                         <a:buNone/>
                       </a:pPr>
                       <a:r>
@@ -6511,7 +6469,7 @@
                       </a:endParaRPr>
                     </a:p>
                   </a:txBody>
-                  <a:tcPr marL="91440" marR="91440" marT="45720" marB="45720" anchor="ctr">
+                  <a:tcPr anchor="ctr">
                     <a:lnL w="6350" cap="flat" cmpd="sng" algn="ctr">
                       <a:solidFill>
                         <a:srgbClr val="D8E0E4"/>
@@ -6550,6 +6508,11 @@
                     </a:lnB>
                   </a:tcPr>
                 </a:tc>
+                <a:extLst>
+                  <a:ext uri="{0D108BD9-81ED-4DB2-BD59-A6C34878D82A}">
+                    <a16:rowId xmlns:a16="http://schemas.microsoft.com/office/drawing/2014/main" val="10006"/>
+                  </a:ext>
+                </a:extLst>
               </a:tr>
             </a:tbl>
           </a:graphicData>
@@ -6557,15 +6520,15 @@
       </p:graphicFrame>
       <p:pic>
         <p:nvPicPr>
-          <p:cNvPr id="5" name="Image 0" descr="img/fig4_stage1_selection.png">    </p:cNvPr>
+          <p:cNvPr id="5" name="Image 0" descr="img/fig4_stage1_selection.png"/>
           <p:cNvPicPr>
             <a:picLocks noChangeAspect="1"/>
           </p:cNvPicPr>
           <p:nvPr/>
         </p:nvPicPr>
         <p:blipFill>
-          <a:blip r:embed="rId1"/>
-          <a:srcRect l="0" r="0" t="0" b="0"/>
+          <a:blip r:embed="rId3"/>
+          <a:srcRect/>
           <a:stretch/>
         </p:blipFill>
         <p:spPr>
@@ -6580,7 +6543,7 @@
       </p:pic>
       <p:sp>
         <p:nvSpPr>
-          <p:cNvPr id="6" name="Text 2"/>
+          <p:cNvPr id="4" name="Text 2"/>
           <p:cNvSpPr/>
           <p:nvPr/>
         </p:nvSpPr>
@@ -6599,7 +6562,7 @@
           <a:bodyPr wrap="square" lIns="0" tIns="0" rIns="0" bIns="0" rtlCol="0" anchor="ctr"/>
           <a:lstStyle/>
           <a:p>
-            <a:pPr indent="0" marL="0">
+            <a:pPr marL="0" indent="0">
               <a:buNone/>
             </a:pPr>
             <a:r>
@@ -6633,6 +6596,7 @@
         <a:solidFill>
           <a:srgbClr val="FFFFFF"/>
         </a:solidFill>
+        <a:effectLst/>
       </p:bgPr>
     </p:bg>
     <p:spTree>
@@ -6670,11 +6634,11 @@
           <a:bodyPr wrap="square" lIns="0" tIns="0" rIns="0" bIns="0" rtlCol="0" anchor="ctr"/>
           <a:lstStyle/>
           <a:p>
-            <a:pPr algn="l" indent="0" marL="0">
+            <a:pPr marL="0" indent="0" algn="l">
               <a:buNone/>
             </a:pPr>
             <a:r>
-              <a:rPr lang="en-US" sz="1100" b="1" spc="200" kern="0" dirty="0">
+              <a:rPr lang="en-US" sz="1100" b="1" kern="0" spc="200" dirty="0">
                 <a:solidFill>
                   <a:srgbClr val="0F8B8D"/>
                 </a:solidFill>
@@ -6709,7 +6673,7 @@
           <a:bodyPr wrap="square" lIns="0" tIns="0" rIns="0" bIns="0" rtlCol="0" anchor="t"/>
           <a:lstStyle/>
           <a:p>
-            <a:pPr algn="l" indent="0" marL="0">
+            <a:pPr marL="0" indent="0" algn="l">
               <a:buNone/>
             </a:pPr>
             <a:r>
@@ -6753,13 +6717,20 @@
             <a:prstDash val="solid"/>
           </a:ln>
           <a:effectLst>
-            <a:outerShdw sx="100000" sy="100000" kx="0" ky="0" algn="bl" rotWithShape="0" blurRad="114300" dist="38100" dir="8100000">
+            <a:outerShdw blurRad="114300" dist="38100" dir="8100000" algn="bl" rotWithShape="0">
               <a:srgbClr val="9AA7AE">
                 <a:alpha val="25000"/>
               </a:srgbClr>
             </a:outerShdw>
           </a:effectLst>
         </p:spPr>
+        <p:txBody>
+          <a:bodyPr/>
+          <a:lstStyle/>
+          <a:p>
+            <a:endParaRPr lang="en-AU"/>
+          </a:p>
+        </p:txBody>
       </p:sp>
       <p:sp>
         <p:nvSpPr>
@@ -6782,7 +6753,7 @@
           <a:bodyPr wrap="square" lIns="0" tIns="0" rIns="0" bIns="0" rtlCol="0" anchor="ctr"/>
           <a:lstStyle/>
           <a:p>
-            <a:pPr indent="0" marL="0">
+            <a:pPr marL="0" indent="0">
               <a:buNone/>
             </a:pPr>
             <a:r>
@@ -6821,7 +6792,7 @@
           <a:bodyPr wrap="square" lIns="0" tIns="0" rIns="0" bIns="0" rtlCol="0" anchor="ctr"/>
           <a:lstStyle/>
           <a:p>
-            <a:pPr indent="0" marL="0">
+            <a:pPr marL="0" indent="0">
               <a:buNone/>
             </a:pPr>
             <a:r>
@@ -6860,7 +6831,7 @@
           <a:bodyPr wrap="square" lIns="0" tIns="0" rIns="0" bIns="0" rtlCol="0" anchor="ctr"/>
           <a:lstStyle/>
           <a:p>
-            <a:pPr indent="0" marL="0">
+            <a:pPr marL="0" indent="0">
               <a:buNone/>
             </a:pPr>
             <a:r>
@@ -6874,9 +6845,6 @@
               </a:rPr>
               <a:t>return </a:t>
             </a:r>
-            <a:pPr indent="0" marL="0">
-              <a:buNone/>
-            </a:pPr>
             <a:r>
               <a:rPr lang="en-US" sz="1400" b="1" dirty="0">
                 <a:solidFill>
@@ -6913,7 +6881,7 @@
           <a:bodyPr wrap="square" lIns="0" tIns="0" rIns="0" bIns="0" rtlCol="0" anchor="ctr"/>
           <a:lstStyle/>
           <a:p>
-            <a:pPr indent="0" marL="0">
+            <a:pPr marL="0" indent="0">
               <a:buNone/>
             </a:pPr>
             <a:r>
@@ -6927,9 +6895,6 @@
               </a:rPr>
               <a:t>cost </a:t>
             </a:r>
-            <a:pPr indent="0" marL="0">
-              <a:buNone/>
-            </a:pPr>
             <a:r>
               <a:rPr lang="en-US" sz="2000" b="1" dirty="0">
                 <a:solidFill>
@@ -6971,13 +6936,20 @@
             <a:prstDash val="solid"/>
           </a:ln>
           <a:effectLst>
-            <a:outerShdw sx="100000" sy="100000" kx="0" ky="0" algn="bl" rotWithShape="0" blurRad="114300" dist="38100" dir="8100000">
+            <a:outerShdw blurRad="114300" dist="38100" dir="8100000" algn="bl" rotWithShape="0">
               <a:srgbClr val="9AA7AE">
                 <a:alpha val="25000"/>
               </a:srgbClr>
             </a:outerShdw>
           </a:effectLst>
         </p:spPr>
+        <p:txBody>
+          <a:bodyPr/>
+          <a:lstStyle/>
+          <a:p>
+            <a:endParaRPr lang="en-AU"/>
+          </a:p>
+        </p:txBody>
       </p:sp>
       <p:sp>
         <p:nvSpPr>
@@ -7000,7 +6972,7 @@
           <a:bodyPr wrap="square" lIns="0" tIns="0" rIns="0" bIns="0" rtlCol="0" anchor="ctr"/>
           <a:lstStyle/>
           <a:p>
-            <a:pPr indent="0" marL="0">
+            <a:pPr marL="0" indent="0">
               <a:buNone/>
             </a:pPr>
             <a:r>
@@ -7039,7 +7011,7 @@
           <a:bodyPr wrap="square" lIns="0" tIns="0" rIns="0" bIns="0" rtlCol="0" anchor="ctr"/>
           <a:lstStyle/>
           <a:p>
-            <a:pPr indent="0" marL="0">
+            <a:pPr marL="0" indent="0">
               <a:buNone/>
             </a:pPr>
             <a:r>
@@ -7078,7 +7050,7 @@
           <a:bodyPr wrap="square" lIns="0" tIns="0" rIns="0" bIns="0" rtlCol="0" anchor="ctr"/>
           <a:lstStyle/>
           <a:p>
-            <a:pPr indent="0" marL="0">
+            <a:pPr marL="0" indent="0">
               <a:buNone/>
             </a:pPr>
             <a:r>
@@ -7092,9 +7064,6 @@
               </a:rPr>
               <a:t>return </a:t>
             </a:r>
-            <a:pPr indent="0" marL="0">
-              <a:buNone/>
-            </a:pPr>
             <a:r>
               <a:rPr lang="en-US" sz="1400" b="1" dirty="0">
                 <a:solidFill>
@@ -7131,7 +7100,7 @@
           <a:bodyPr wrap="square" lIns="0" tIns="0" rIns="0" bIns="0" rtlCol="0" anchor="ctr"/>
           <a:lstStyle/>
           <a:p>
-            <a:pPr indent="0" marL="0">
+            <a:pPr marL="0" indent="0">
               <a:buNone/>
             </a:pPr>
             <a:r>
@@ -7145,9 +7114,6 @@
               </a:rPr>
               <a:t>cost </a:t>
             </a:r>
-            <a:pPr indent="0" marL="0">
-              <a:buNone/>
-            </a:pPr>
             <a:r>
               <a:rPr lang="en-US" sz="2000" b="1" dirty="0">
                 <a:solidFill>
@@ -7184,7 +7150,7 @@
           <a:bodyPr wrap="square" lIns="0" tIns="0" rIns="0" bIns="0" rtlCol="0" anchor="ctr"/>
           <a:lstStyle/>
           <a:p>
-            <a:pPr algn="ctr" indent="0" marL="0">
+            <a:pPr marL="0" indent="0" algn="ctr">
               <a:buNone/>
             </a:pPr>
             <a:r>
@@ -7218,6 +7184,7 @@
         <a:solidFill>
           <a:srgbClr val="FFFFFF"/>
         </a:solidFill>
+        <a:effectLst/>
       </p:bgPr>
     </p:bg>
     <p:spTree>
@@ -7255,11 +7222,11 @@
           <a:bodyPr wrap="square" lIns="0" tIns="0" rIns="0" bIns="0" rtlCol="0" anchor="ctr"/>
           <a:lstStyle/>
           <a:p>
-            <a:pPr algn="l" indent="0" marL="0">
+            <a:pPr marL="0" indent="0" algn="l">
               <a:buNone/>
             </a:pPr>
             <a:r>
-              <a:rPr lang="en-US" sz="1100" b="1" spc="200" kern="0" dirty="0">
+              <a:rPr lang="en-US" sz="1100" b="1" kern="0" spc="200" dirty="0">
                 <a:solidFill>
                   <a:srgbClr val="C0392B"/>
                 </a:solidFill>
@@ -7294,7 +7261,7 @@
           <a:bodyPr wrap="square" lIns="0" tIns="0" rIns="0" bIns="0" rtlCol="0" anchor="t"/>
           <a:lstStyle/>
           <a:p>
-            <a:pPr algn="l" indent="0" marL="0">
+            <a:pPr marL="0" indent="0" algn="l">
               <a:buNone/>
             </a:pPr>
             <a:r>
@@ -7314,15 +7281,15 @@
       </p:sp>
       <p:pic>
         <p:nvPicPr>
-          <p:cNvPr id="4" name="Image 0" descr="img/fig5_stage2_scatter.png">    </p:cNvPr>
+          <p:cNvPr id="4" name="Image 0" descr="img/fig5_stage2_scatter.png"/>
           <p:cNvPicPr>
             <a:picLocks noChangeAspect="1"/>
           </p:cNvPicPr>
           <p:nvPr/>
         </p:nvPicPr>
         <p:blipFill>
-          <a:blip r:embed="rId1"/>
-          <a:srcRect l="0" r="0" t="0" b="0"/>
+          <a:blip r:embed="rId3"/>
+          <a:srcRect/>
           <a:stretch/>
         </p:blipFill>
         <p:spPr>
@@ -7361,6 +7328,13 @@
             <a:prstDash val="solid"/>
           </a:ln>
         </p:spPr>
+        <p:txBody>
+          <a:bodyPr/>
+          <a:lstStyle/>
+          <a:p>
+            <a:endParaRPr lang="en-AU"/>
+          </a:p>
+        </p:txBody>
       </p:sp>
       <p:sp>
         <p:nvSpPr>
@@ -7383,7 +7357,7 @@
           <a:bodyPr wrap="square" lIns="0" tIns="0" rIns="0" bIns="0" rtlCol="0" anchor="ctr"/>
           <a:lstStyle/>
           <a:p>
-            <a:pPr indent="0" marL="0">
+            <a:pPr marL="0" indent="0">
               <a:lnSpc>
                 <a:spcPct val="110000"/>
               </a:lnSpc>
@@ -7400,72 +7374,60 @@
               </a:rPr>
               <a:t>Every </a:t>
             </a:r>
-            <a:pPr indent="0" marL="0">
+            <a:r>
+              <a:rPr lang="en-US" sz="1450" b="1" dirty="0">
+                <a:solidFill>
+                  <a:srgbClr val="C0392B"/>
+                </a:solidFill>
+                <a:latin typeface="Calibri" pitchFamily="34" charset="0"/>
+                <a:ea typeface="Calibri" pitchFamily="34" charset="-122"/>
+                <a:cs typeface="Calibri" pitchFamily="34" charset="-120"/>
+              </a:rPr>
+              <a:t>P4-based</a:t>
+            </a:r>
+            <a:r>
+              <a:rPr lang="en-US" sz="1450" dirty="0">
+                <a:solidFill>
+                  <a:srgbClr val="1B2B36"/>
+                </a:solidFill>
+                <a:latin typeface="Calibri" pitchFamily="34" charset="0"/>
+                <a:ea typeface="Calibri" pitchFamily="34" charset="-122"/>
+                <a:cs typeface="Calibri" pitchFamily="34" charset="-120"/>
+              </a:rPr>
+              <a:t> config fails the budget — no matter how we tune λ.</a:t>
+            </a:r>
+            <a:endParaRPr lang="en-US" sz="1450" dirty="0"/>
+          </a:p>
+        </p:txBody>
+      </p:sp>
+      <p:sp>
+        <p:nvSpPr>
+          <p:cNvPr id="7" name="Text 4"/>
+          <p:cNvSpPr/>
+          <p:nvPr/>
+        </p:nvSpPr>
+        <p:spPr>
+          <a:xfrm>
+            <a:off x="502920" y="3108960"/>
+            <a:ext cx="3566160" cy="731520"/>
+          </a:xfrm>
+          <a:prstGeom prst="rect">
+            <a:avLst/>
+          </a:prstGeom>
+          <a:noFill/>
+          <a:ln/>
+        </p:spPr>
+        <p:txBody>
+          <a:bodyPr wrap="square" lIns="0" tIns="0" rIns="0" bIns="0" rtlCol="0" anchor="ctr"/>
+          <a:lstStyle/>
+          <a:p>
+            <a:pPr marL="0" indent="0">
               <a:lnSpc>
                 <a:spcPct val="110000"/>
               </a:lnSpc>
               <a:buNone/>
             </a:pPr>
             <a:r>
-              <a:rPr lang="en-US" sz="1450" b="1" dirty="0">
-                <a:solidFill>
-                  <a:srgbClr val="C0392B"/>
-                </a:solidFill>
-                <a:latin typeface="Calibri" pitchFamily="34" charset="0"/>
-                <a:ea typeface="Calibri" pitchFamily="34" charset="-122"/>
-                <a:cs typeface="Calibri" pitchFamily="34" charset="-120"/>
-              </a:rPr>
-              <a:t>P4-based</a:t>
-            </a:r>
-            <a:pPr indent="0" marL="0">
-              <a:lnSpc>
-                <a:spcPct val="110000"/>
-              </a:lnSpc>
-              <a:buNone/>
-            </a:pPr>
-            <a:r>
-              <a:rPr lang="en-US" sz="1450" dirty="0">
-                <a:solidFill>
-                  <a:srgbClr val="1B2B36"/>
-                </a:solidFill>
-                <a:latin typeface="Calibri" pitchFamily="34" charset="0"/>
-                <a:ea typeface="Calibri" pitchFamily="34" charset="-122"/>
-                <a:cs typeface="Calibri" pitchFamily="34" charset="-120"/>
-              </a:rPr>
-              <a:t> config fails the budget — no matter how we tune λ.</a:t>
-            </a:r>
-            <a:endParaRPr lang="en-US" sz="1450" dirty="0"/>
-          </a:p>
-        </p:txBody>
-      </p:sp>
-      <p:sp>
-        <p:nvSpPr>
-          <p:cNvPr id="7" name="Text 4"/>
-          <p:cNvSpPr/>
-          <p:nvPr/>
-        </p:nvSpPr>
-        <p:spPr>
-          <a:xfrm>
-            <a:off x="502920" y="3108960"/>
-            <a:ext cx="3566160" cy="731520"/>
-          </a:xfrm>
-          <a:prstGeom prst="rect">
-            <a:avLst/>
-          </a:prstGeom>
-          <a:noFill/>
-          <a:ln/>
-        </p:spPr>
-        <p:txBody>
-          <a:bodyPr wrap="square" lIns="0" tIns="0" rIns="0" bIns="0" rtlCol="0" anchor="ctr"/>
-          <a:lstStyle/>
-          <a:p>
-            <a:pPr indent="0" marL="0">
-              <a:lnSpc>
-                <a:spcPct val="110000"/>
-              </a:lnSpc>
-              <a:buNone/>
-            </a:pPr>
-            <a:r>
               <a:rPr lang="en-US" sz="1600" b="1" dirty="0">
                 <a:solidFill>
                   <a:srgbClr val="1B2B36"/>
@@ -7476,12 +7438,6 @@
               </a:rPr>
               <a:t>Feasibility is set by the base's </a:t>
             </a:r>
-            <a:pPr indent="0" marL="0">
-              <a:lnSpc>
-                <a:spcPct val="110000"/>
-              </a:lnSpc>
-              <a:buNone/>
-            </a:pPr>
             <a:r>
               <a:rPr lang="en-US" sz="1600" b="1" dirty="0">
                 <a:solidFill>
@@ -7493,12 +7449,6 @@
               </a:rPr>
               <a:t>COST</a:t>
             </a:r>
-            <a:pPr indent="0" marL="0">
-              <a:lnSpc>
-                <a:spcPct val="110000"/>
-              </a:lnSpc>
-              <a:buNone/>
-            </a:pPr>
             <a:r>
               <a:rPr lang="en-US" sz="1600" b="1" dirty="0">
                 <a:solidFill>
@@ -7535,7 +7485,7 @@
           <a:bodyPr wrap="square" lIns="0" tIns="0" rIns="0" bIns="0" rtlCol="0" anchor="ctr"/>
           <a:lstStyle/>
           <a:p>
-            <a:pPr indent="0" marL="0">
+            <a:pPr marL="0" indent="0">
               <a:buNone/>
             </a:pPr>
             <a:r>
@@ -7569,6 +7519,7 @@
         <a:solidFill>
           <a:srgbClr val="FFFFFF"/>
         </a:solidFill>
+        <a:effectLst/>
       </p:bgPr>
     </p:bg>
     <p:spTree>
@@ -7606,11 +7557,11 @@
           <a:bodyPr wrap="square" lIns="0" tIns="0" rIns="0" bIns="0" rtlCol="0" anchor="ctr"/>
           <a:lstStyle/>
           <a:p>
-            <a:pPr algn="l" indent="0" marL="0">
+            <a:pPr marL="0" indent="0" algn="l">
               <a:buNone/>
             </a:pPr>
             <a:r>
-              <a:rPr lang="en-US" sz="1100" b="1" spc="200" kern="0" dirty="0">
+              <a:rPr lang="en-US" sz="1100" b="1" kern="0" spc="200" dirty="0">
                 <a:solidFill>
                   <a:srgbClr val="2E8B57"/>
                 </a:solidFill>
@@ -7645,7 +7596,7 @@
           <a:bodyPr wrap="square" lIns="0" tIns="0" rIns="0" bIns="0" rtlCol="0" anchor="t"/>
           <a:lstStyle/>
           <a:p>
-            <a:pPr algn="l" indent="0" marL="0">
+            <a:pPr marL="0" indent="0" algn="l">
               <a:buNone/>
             </a:pPr>
             <a:r>
@@ -7687,13 +7638,20 @@
             <a:prstDash val="solid"/>
           </a:ln>
           <a:effectLst>
-            <a:outerShdw sx="100000" sy="100000" kx="0" ky="0" algn="bl" rotWithShape="0" blurRad="114300" dist="38100" dir="8100000">
+            <a:outerShdw blurRad="114300" dist="38100" dir="8100000" algn="bl" rotWithShape="0">
               <a:srgbClr val="9AA7AE">
                 <a:alpha val="25000"/>
               </a:srgbClr>
             </a:outerShdw>
           </a:effectLst>
         </p:spPr>
+        <p:txBody>
+          <a:bodyPr/>
+          <a:lstStyle/>
+          <a:p>
+            <a:endParaRPr lang="en-AU"/>
+          </a:p>
+        </p:txBody>
       </p:sp>
       <p:sp>
         <p:nvSpPr>
@@ -7714,6 +7672,13 @@
           </a:solidFill>
           <a:ln/>
         </p:spPr>
+        <p:txBody>
+          <a:bodyPr/>
+          <a:lstStyle/>
+          <a:p>
+            <a:endParaRPr lang="en-AU"/>
+          </a:p>
+        </p:txBody>
       </p:sp>
       <p:sp>
         <p:nvSpPr>
@@ -7736,7 +7701,7 @@
           <a:bodyPr wrap="square" lIns="0" tIns="0" rIns="0" bIns="0" rtlCol="0" anchor="ctr"/>
           <a:lstStyle/>
           <a:p>
-            <a:pPr algn="l" indent="0" marL="0">
+            <a:pPr marL="0" indent="0" algn="l">
               <a:buNone/>
             </a:pPr>
             <a:r>
@@ -7775,7 +7740,7 @@
           <a:bodyPr wrap="square" lIns="0" tIns="0" rIns="0" bIns="0" rtlCol="0" anchor="ctr"/>
           <a:lstStyle/>
           <a:p>
-            <a:pPr algn="l" indent="0" marL="0">
+            <a:pPr marL="0" indent="0" algn="l">
               <a:buNone/>
             </a:pPr>
             <a:r>
@@ -7817,13 +7782,20 @@
             <a:prstDash val="solid"/>
           </a:ln>
           <a:effectLst>
-            <a:outerShdw sx="100000" sy="100000" kx="0" ky="0" algn="bl" rotWithShape="0" blurRad="114300" dist="38100" dir="8100000">
+            <a:outerShdw blurRad="114300" dist="38100" dir="8100000" algn="bl" rotWithShape="0">
               <a:srgbClr val="9AA7AE">
                 <a:alpha val="25000"/>
               </a:srgbClr>
             </a:outerShdw>
           </a:effectLst>
         </p:spPr>
+        <p:txBody>
+          <a:bodyPr/>
+          <a:lstStyle/>
+          <a:p>
+            <a:endParaRPr lang="en-AU"/>
+          </a:p>
+        </p:txBody>
       </p:sp>
       <p:sp>
         <p:nvSpPr>
@@ -7844,6 +7816,13 @@
           </a:solidFill>
           <a:ln/>
         </p:spPr>
+        <p:txBody>
+          <a:bodyPr/>
+          <a:lstStyle/>
+          <a:p>
+            <a:endParaRPr lang="en-AU"/>
+          </a:p>
+        </p:txBody>
       </p:sp>
       <p:sp>
         <p:nvSpPr>
@@ -7866,7 +7845,7 @@
           <a:bodyPr wrap="square" lIns="0" tIns="0" rIns="0" bIns="0" rtlCol="0" anchor="ctr"/>
           <a:lstStyle/>
           <a:p>
-            <a:pPr algn="l" indent="0" marL="0">
+            <a:pPr marL="0" indent="0" algn="l">
               <a:buNone/>
             </a:pPr>
             <a:r>
@@ -7905,7 +7884,7 @@
           <a:bodyPr wrap="square" lIns="0" tIns="0" rIns="0" bIns="0" rtlCol="0" anchor="ctr"/>
           <a:lstStyle/>
           <a:p>
-            <a:pPr algn="l" indent="0" marL="0">
+            <a:pPr marL="0" indent="0" algn="l">
               <a:buNone/>
             </a:pPr>
             <a:r>
@@ -7947,13 +7926,20 @@
             <a:prstDash val="solid"/>
           </a:ln>
           <a:effectLst>
-            <a:outerShdw sx="100000" sy="100000" kx="0" ky="0" algn="bl" rotWithShape="0" blurRad="114300" dist="38100" dir="8100000">
+            <a:outerShdw blurRad="114300" dist="38100" dir="8100000" algn="bl" rotWithShape="0">
               <a:srgbClr val="9AA7AE">
                 <a:alpha val="25000"/>
               </a:srgbClr>
             </a:outerShdw>
           </a:effectLst>
         </p:spPr>
+        <p:txBody>
+          <a:bodyPr/>
+          <a:lstStyle/>
+          <a:p>
+            <a:endParaRPr lang="en-AU"/>
+          </a:p>
+        </p:txBody>
       </p:sp>
       <p:sp>
         <p:nvSpPr>
@@ -7974,6 +7960,13 @@
           </a:solidFill>
           <a:ln/>
         </p:spPr>
+        <p:txBody>
+          <a:bodyPr/>
+          <a:lstStyle/>
+          <a:p>
+            <a:endParaRPr lang="en-AU"/>
+          </a:p>
+        </p:txBody>
       </p:sp>
       <p:sp>
         <p:nvSpPr>
@@ -7996,7 +7989,7 @@
           <a:bodyPr wrap="square" lIns="0" tIns="0" rIns="0" bIns="0" rtlCol="0" anchor="ctr"/>
           <a:lstStyle/>
           <a:p>
-            <a:pPr algn="l" indent="0" marL="0">
+            <a:pPr marL="0" indent="0" algn="l">
               <a:buNone/>
             </a:pPr>
             <a:r>
@@ -8035,7 +8028,7 @@
           <a:bodyPr wrap="square" lIns="0" tIns="0" rIns="0" bIns="0" rtlCol="0" anchor="ctr"/>
           <a:lstStyle/>
           <a:p>
-            <a:pPr algn="l" indent="0" marL="0">
+            <a:pPr marL="0" indent="0" algn="l">
               <a:buNone/>
             </a:pPr>
             <a:r>
@@ -8055,15 +8048,15 @@
       </p:sp>
       <p:pic>
         <p:nvPicPr>
-          <p:cNvPr id="16" name="Image 0" descr="img/fig2_safe_dual.png">    </p:cNvPr>
+          <p:cNvPr id="16" name="Image 0" descr="img/fig2_safe_dual.png"/>
           <p:cNvPicPr>
             <a:picLocks noChangeAspect="1"/>
           </p:cNvPicPr>
           <p:nvPr/>
         </p:nvPicPr>
         <p:blipFill>
-          <a:blip r:embed="rId1"/>
-          <a:srcRect l="0" r="0" t="0" b="0"/>
+          <a:blip r:embed="rId3"/>
+          <a:srcRect/>
           <a:stretch/>
         </p:blipFill>
         <p:spPr>
@@ -8078,15 +8071,15 @@
       </p:pic>
       <p:pic>
         <p:nvPicPr>
-          <p:cNvPr id="17" name="Image 1" descr="img/fig3_lambda_cost.png">    </p:cNvPr>
+          <p:cNvPr id="17" name="Image 1" descr="img/fig3_lambda_cost.png"/>
           <p:cNvPicPr>
             <a:picLocks noChangeAspect="1"/>
           </p:cNvPicPr>
           <p:nvPr/>
         </p:nvPicPr>
         <p:blipFill>
-          <a:blip r:embed="rId2"/>
-          <a:srcRect l="0" r="0" t="0" b="0"/>
+          <a:blip r:embed="rId4"/>
+          <a:srcRect/>
           <a:stretch/>
         </p:blipFill>
         <p:spPr>
@@ -8115,6 +8108,7 @@
         <a:solidFill>
           <a:srgbClr val="FFFFFF"/>
         </a:solidFill>
+        <a:effectLst/>
       </p:bgPr>
     </p:bg>
     <p:spTree>
@@ -8152,11 +8146,11 @@
           <a:bodyPr wrap="square" lIns="0" tIns="0" rIns="0" bIns="0" rtlCol="0" anchor="ctr"/>
           <a:lstStyle/>
           <a:p>
-            <a:pPr algn="l" indent="0" marL="0">
+            <a:pPr marL="0" indent="0" algn="l">
               <a:buNone/>
             </a:pPr>
             <a:r>
-              <a:rPr lang="en-US" sz="1100" b="1" spc="200" kern="0" dirty="0">
+              <a:rPr lang="en-US" sz="1100" b="1" kern="0" spc="200" dirty="0">
                 <a:solidFill>
                   <a:srgbClr val="0F8B8D"/>
                 </a:solidFill>
@@ -8191,7 +8185,7 @@
           <a:bodyPr wrap="square" lIns="0" tIns="0" rIns="0" bIns="0" rtlCol="0" anchor="t"/>
           <a:lstStyle/>
           <a:p>
-            <a:pPr algn="l" indent="0" marL="0">
+            <a:pPr marL="0" indent="0" algn="l">
               <a:buNone/>
             </a:pPr>
             <a:r>
@@ -8228,6 +8222,13 @@
           </a:solidFill>
           <a:ln/>
         </p:spPr>
+        <p:txBody>
+          <a:bodyPr/>
+          <a:lstStyle/>
+          <a:p>
+            <a:endParaRPr lang="en-AU"/>
+          </a:p>
+        </p:txBody>
       </p:sp>
       <p:sp>
         <p:nvSpPr>
@@ -8250,7 +8251,7 @@
           <a:bodyPr wrap="square" lIns="0" tIns="0" rIns="0" bIns="0" rtlCol="0" anchor="ctr"/>
           <a:lstStyle/>
           <a:p>
-            <a:pPr algn="ctr" indent="0" marL="0">
+            <a:pPr marL="0" indent="0" algn="ctr">
               <a:buNone/>
             </a:pPr>
             <a:r>
@@ -8289,7 +8290,7 @@
           <a:bodyPr wrap="square" lIns="0" tIns="0" rIns="0" bIns="0" rtlCol="0" anchor="ctr"/>
           <a:lstStyle/>
           <a:p>
-            <a:pPr indent="0" marL="0">
+            <a:pPr marL="0" indent="0">
               <a:buNone/>
             </a:pPr>
             <a:r>
@@ -8303,9 +8304,6 @@
               </a:rPr>
               <a:t>Confirm on 5 seeds</a:t>
             </a:r>
-            <a:pPr indent="0" marL="0">
-              <a:buNone/>
-            </a:pPr>
             <a:r>
               <a:rPr lang="en-US" sz="1250" dirty="0">
                 <a:solidFill>
@@ -8340,6 +8338,13 @@
           </a:solidFill>
           <a:ln/>
         </p:spPr>
+        <p:txBody>
+          <a:bodyPr/>
+          <a:lstStyle/>
+          <a:p>
+            <a:endParaRPr lang="en-AU"/>
+          </a:p>
+        </p:txBody>
       </p:sp>
       <p:sp>
         <p:nvSpPr>
@@ -8362,7 +8367,7 @@
           <a:bodyPr wrap="square" lIns="0" tIns="0" rIns="0" bIns="0" rtlCol="0" anchor="ctr"/>
           <a:lstStyle/>
           <a:p>
-            <a:pPr algn="ctr" indent="0" marL="0">
+            <a:pPr marL="0" indent="0" algn="ctr">
               <a:buNone/>
             </a:pPr>
             <a:r>
@@ -8401,7 +8406,7 @@
           <a:bodyPr wrap="square" lIns="0" tIns="0" rIns="0" bIns="0" rtlCol="0" anchor="ctr"/>
           <a:lstStyle/>
           <a:p>
-            <a:pPr indent="0" marL="0">
+            <a:pPr marL="0" indent="0">
               <a:buNone/>
             </a:pPr>
             <a:r>
@@ -8415,9 +8420,6 @@
               </a:rPr>
               <a:t>Widen the safety grid</a:t>
             </a:r>
-            <a:pPr indent="0" marL="0">
-              <a:buNone/>
-            </a:pPr>
             <a:r>
               <a:rPr lang="en-US" sz="1250" dirty="0">
                 <a:solidFill>
@@ -8452,6 +8454,13 @@
           </a:solidFill>
           <a:ln/>
         </p:spPr>
+        <p:txBody>
+          <a:bodyPr/>
+          <a:lstStyle/>
+          <a:p>
+            <a:endParaRPr lang="en-AU"/>
+          </a:p>
+        </p:txBody>
       </p:sp>
       <p:sp>
         <p:nvSpPr>
@@ -8474,7 +8483,7 @@
           <a:bodyPr wrap="square" lIns="0" tIns="0" rIns="0" bIns="0" rtlCol="0" anchor="ctr"/>
           <a:lstStyle/>
           <a:p>
-            <a:pPr algn="ctr" indent="0" marL="0">
+            <a:pPr marL="0" indent="0" algn="ctr">
               <a:buNone/>
             </a:pPr>
             <a:r>
@@ -8513,7 +8522,7 @@
           <a:bodyPr wrap="square" lIns="0" tIns="0" rIns="0" bIns="0" rtlCol="0" anchor="ctr"/>
           <a:lstStyle/>
           <a:p>
-            <a:pPr indent="0" marL="0">
+            <a:pPr marL="0" indent="0">
               <a:buNone/>
             </a:pPr>
             <a:r>
@@ -8527,9 +8536,6 @@
               </a:rPr>
               <a:t>Sweep the budget → Pareto front</a:t>
             </a:r>
-            <a:pPr indent="0" marL="0">
-              <a:buNone/>
-            </a:pPr>
             <a:r>
               <a:rPr lang="en-US" sz="1250" dirty="0">
                 <a:solidFill>
@@ -8564,6 +8570,13 @@
           </a:solidFill>
           <a:ln/>
         </p:spPr>
+        <p:txBody>
+          <a:bodyPr/>
+          <a:lstStyle/>
+          <a:p>
+            <a:endParaRPr lang="en-AU"/>
+          </a:p>
+        </p:txBody>
       </p:sp>
       <p:sp>
         <p:nvSpPr>
@@ -8586,7 +8599,7 @@
           <a:bodyPr wrap="square" lIns="0" tIns="0" rIns="0" bIns="0" rtlCol="0" anchor="ctr"/>
           <a:lstStyle/>
           <a:p>
-            <a:pPr algn="ctr" indent="0" marL="0">
+            <a:pPr marL="0" indent="0" algn="ctr">
               <a:buNone/>
             </a:pPr>
             <a:r>
@@ -8625,7 +8638,7 @@
           <a:bodyPr wrap="square" lIns="0" tIns="0" rIns="0" bIns="0" rtlCol="0" anchor="ctr"/>
           <a:lstStyle/>
           <a:p>
-            <a:pPr indent="0" marL="0">
+            <a:pPr marL="0" indent="0">
               <a:buNone/>
             </a:pPr>
             <a:r>
@@ -8639,9 +8652,6 @@
               </a:rPr>
               <a:t>Full base × safety ablation</a:t>
             </a:r>
-            <a:pPr indent="0" marL="0">
-              <a:buNone/>
-            </a:pPr>
             <a:r>
               <a:rPr lang="en-US" sz="1250" dirty="0">
                 <a:solidFill>
@@ -8676,6 +8686,13 @@
           </a:solidFill>
           <a:ln/>
         </p:spPr>
+        <p:txBody>
+          <a:bodyPr/>
+          <a:lstStyle/>
+          <a:p>
+            <a:endParaRPr lang="en-AU"/>
+          </a:p>
+        </p:txBody>
       </p:sp>
       <p:sp>
         <p:nvSpPr>
@@ -8698,7 +8715,7 @@
           <a:bodyPr wrap="square" lIns="0" tIns="0" rIns="0" bIns="0" rtlCol="0" anchor="ctr"/>
           <a:lstStyle/>
           <a:p>
-            <a:pPr algn="ctr" indent="0" marL="0">
+            <a:pPr marL="0" indent="0" algn="ctr">
               <a:buNone/>
             </a:pPr>
             <a:r>
@@ -8737,7 +8754,7 @@
           <a:bodyPr wrap="square" lIns="0" tIns="0" rIns="0" bIns="0" rtlCol="0" anchor="ctr"/>
           <a:lstStyle/>
           <a:p>
-            <a:pPr indent="0" marL="0">
+            <a:pPr marL="0" indent="0">
               <a:buNone/>
             </a:pPr>
             <a:r>
@@ -8751,9 +8768,6 @@
               </a:rPr>
               <a:t>Reconcile the cost metric</a:t>
             </a:r>
-            <a:pPr indent="0" marL="0">
-              <a:buNone/>
-            </a:pPr>
             <a:r>
               <a:rPr lang="en-US" sz="1250" dirty="0">
                 <a:solidFill>
@@ -8790,7 +8804,7 @@
           <a:bodyPr wrap="square" lIns="0" tIns="0" rIns="0" bIns="0" rtlCol="0" anchor="ctr"/>
           <a:lstStyle/>
           <a:p>
-            <a:pPr indent="0" marL="0">
+            <a:pPr marL="0" indent="0">
               <a:buNone/>
             </a:pPr>
             <a:r>
@@ -9109,4 +9123,319 @@
     </a:ext>
   </a:extLst>
 </a:theme>
+</file>
+
+<file path=ppt/theme/theme2.xml><?xml version="1.0" encoding="utf-8"?>
+<a:theme xmlns:a="http://schemas.openxmlformats.org/drawingml/2006/main" name="Office Theme">
+  <a:themeElements>
+    <a:clrScheme name="Office">
+      <a:dk1>
+        <a:sysClr val="windowText" lastClr="000000"/>
+      </a:dk1>
+      <a:lt1>
+        <a:sysClr val="window" lastClr="FFFFFF"/>
+      </a:lt1>
+      <a:dk2>
+        <a:srgbClr val="0E2841"/>
+      </a:dk2>
+      <a:lt2>
+        <a:srgbClr val="E8E8E8"/>
+      </a:lt2>
+      <a:accent1>
+        <a:srgbClr val="156082"/>
+      </a:accent1>
+      <a:accent2>
+        <a:srgbClr val="E97132"/>
+      </a:accent2>
+      <a:accent3>
+        <a:srgbClr val="196B24"/>
+      </a:accent3>
+      <a:accent4>
+        <a:srgbClr val="0F9ED5"/>
+      </a:accent4>
+      <a:accent5>
+        <a:srgbClr val="A02B93"/>
+      </a:accent5>
+      <a:accent6>
+        <a:srgbClr val="4EA72E"/>
+      </a:accent6>
+      <a:hlink>
+        <a:srgbClr val="467886"/>
+      </a:hlink>
+      <a:folHlink>
+        <a:srgbClr val="96607D"/>
+      </a:folHlink>
+    </a:clrScheme>
+    <a:fontScheme name="Office">
+      <a:majorFont>
+        <a:latin typeface="Aptos Display" panose="02110004020202020204"/>
+        <a:ea typeface=""/>
+        <a:cs typeface=""/>
+        <a:font script="Jpan" typeface="游ゴシック Light"/>
+        <a:font script="Hang" typeface="맑은 고딕"/>
+        <a:font script="Hans" typeface="等线 Light"/>
+        <a:font script="Hant" typeface="新細明體"/>
+        <a:font script="Arab" typeface="Times New Roman"/>
+        <a:font script="Hebr" typeface="Times New Roman"/>
+        <a:font script="Thai" typeface="Angsana New"/>
+        <a:font script="Ethi" typeface="Nyala"/>
+        <a:font script="Beng" typeface="Vrinda"/>
+        <a:font script="Gujr" typeface="Shruti"/>
+        <a:font script="Khmr" typeface="MoolBoran"/>
+        <a:font script="Knda" typeface="Tunga"/>
+        <a:font script="Guru" typeface="Raavi"/>
+        <a:font script="Cans" typeface="Euphemia"/>
+        <a:font script="Cher" typeface="Plantagenet Cherokee"/>
+        <a:font script="Yiii" typeface="Microsoft Yi Baiti"/>
+        <a:font script="Tibt" typeface="Microsoft Himalaya"/>
+        <a:font script="Thaa" typeface="MV Boli"/>
+        <a:font script="Deva" typeface="Mangal"/>
+        <a:font script="Telu" typeface="Gautami"/>
+        <a:font script="Taml" typeface="Latha"/>
+        <a:font script="Syrc" typeface="Estrangelo Edessa"/>
+        <a:font script="Orya" typeface="Kalinga"/>
+        <a:font script="Mlym" typeface="Kartika"/>
+        <a:font script="Laoo" typeface="DokChampa"/>
+        <a:font script="Sinh" typeface="Iskoola Pota"/>
+        <a:font script="Mong" typeface="Mongolian Baiti"/>
+        <a:font script="Viet" typeface="Times New Roman"/>
+        <a:font script="Uigh" typeface="Microsoft Uighur"/>
+        <a:font script="Geor" typeface="Sylfaen"/>
+        <a:font script="Armn" typeface="Arial"/>
+        <a:font script="Bugi" typeface="Leelawadee UI"/>
+        <a:font script="Bopo" typeface="Microsoft JhengHei"/>
+        <a:font script="Java" typeface="Javanese Text"/>
+        <a:font script="Lisu" typeface="Segoe UI"/>
+        <a:font script="Mymr" typeface="Myanmar Text"/>
+        <a:font script="Nkoo" typeface="Ebrima"/>
+        <a:font script="Olck" typeface="Nirmala UI"/>
+        <a:font script="Osma" typeface="Ebrima"/>
+        <a:font script="Phag" typeface="Phagspa"/>
+        <a:font script="Syrn" typeface="Estrangelo Edessa"/>
+        <a:font script="Syrj" typeface="Estrangelo Edessa"/>
+        <a:font script="Syre" typeface="Estrangelo Edessa"/>
+        <a:font script="Sora" typeface="Nirmala UI"/>
+        <a:font script="Tale" typeface="Microsoft Tai Le"/>
+        <a:font script="Talu" typeface="Microsoft New Tai Lue"/>
+        <a:font script="Tfng" typeface="Ebrima"/>
+      </a:majorFont>
+      <a:minorFont>
+        <a:latin typeface="Aptos" panose="02110004020202020204"/>
+        <a:ea typeface=""/>
+        <a:cs typeface=""/>
+        <a:font script="Jpan" typeface="游ゴシック"/>
+        <a:font script="Hang" typeface="맑은 고딕"/>
+        <a:font script="Hans" typeface="等线"/>
+        <a:font script="Hant" typeface="新細明體"/>
+        <a:font script="Arab" typeface="Arial"/>
+        <a:font script="Hebr" typeface="Arial"/>
+        <a:font script="Thai" typeface="Cordia New"/>
+        <a:font script="Ethi" typeface="Nyala"/>
+        <a:font script="Beng" typeface="Vrinda"/>
+        <a:font script="Gujr" typeface="Shruti"/>
+        <a:font script="Khmr" typeface="DaunPenh"/>
+        <a:font script="Knda" typeface="Tunga"/>
+        <a:font script="Guru" typeface="Raavi"/>
+        <a:font script="Cans" typeface="Euphemia"/>
+        <a:font script="Cher" typeface="Plantagenet Cherokee"/>
+        <a:font script="Yiii" typeface="Microsoft Yi Baiti"/>
+        <a:font script="Tibt" typeface="Microsoft Himalaya"/>
+        <a:font script="Thaa" typeface="MV Boli"/>
+        <a:font script="Deva" typeface="Mangal"/>
+        <a:font script="Telu" typeface="Gautami"/>
+        <a:font script="Taml" typeface="Latha"/>
+        <a:font script="Syrc" typeface="Estrangelo Edessa"/>
+        <a:font script="Orya" typeface="Kalinga"/>
+        <a:font script="Mlym" typeface="Kartika"/>
+        <a:font script="Laoo" typeface="DokChampa"/>
+        <a:font script="Sinh" typeface="Iskoola Pota"/>
+        <a:font script="Mong" typeface="Mongolian Baiti"/>
+        <a:font script="Viet" typeface="Arial"/>
+        <a:font script="Uigh" typeface="Microsoft Uighur"/>
+        <a:font script="Geor" typeface="Sylfaen"/>
+        <a:font script="Armn" typeface="Arial"/>
+        <a:font script="Bugi" typeface="Leelawadee UI"/>
+        <a:font script="Bopo" typeface="Microsoft JhengHei"/>
+        <a:font script="Java" typeface="Javanese Text"/>
+        <a:font script="Lisu" typeface="Segoe UI"/>
+        <a:font script="Mymr" typeface="Myanmar Text"/>
+        <a:font script="Nkoo" typeface="Ebrima"/>
+        <a:font script="Olck" typeface="Nirmala UI"/>
+        <a:font script="Osma" typeface="Ebrima"/>
+        <a:font script="Phag" typeface="Phagspa"/>
+        <a:font script="Syrn" typeface="Estrangelo Edessa"/>
+        <a:font script="Syrj" typeface="Estrangelo Edessa"/>
+        <a:font script="Syre" typeface="Estrangelo Edessa"/>
+        <a:font script="Sora" typeface="Nirmala UI"/>
+        <a:font script="Tale" typeface="Microsoft Tai Le"/>
+        <a:font script="Talu" typeface="Microsoft New Tai Lue"/>
+        <a:font script="Tfng" typeface="Ebrima"/>
+      </a:minorFont>
+    </a:fontScheme>
+    <a:fmtScheme name="Office">
+      <a:fillStyleLst>
+        <a:solidFill>
+          <a:schemeClr val="phClr"/>
+        </a:solidFill>
+        <a:gradFill rotWithShape="1">
+          <a:gsLst>
+            <a:gs pos="0">
+              <a:schemeClr val="phClr">
+                <a:lumMod val="110000"/>
+                <a:satMod val="105000"/>
+                <a:tint val="67000"/>
+              </a:schemeClr>
+            </a:gs>
+            <a:gs pos="50000">
+              <a:schemeClr val="phClr">
+                <a:lumMod val="105000"/>
+                <a:satMod val="103000"/>
+                <a:tint val="73000"/>
+              </a:schemeClr>
+            </a:gs>
+            <a:gs pos="100000">
+              <a:schemeClr val="phClr">
+                <a:lumMod val="105000"/>
+                <a:satMod val="109000"/>
+                <a:tint val="81000"/>
+              </a:schemeClr>
+            </a:gs>
+          </a:gsLst>
+          <a:lin ang="5400000" scaled="0"/>
+        </a:gradFill>
+        <a:gradFill rotWithShape="1">
+          <a:gsLst>
+            <a:gs pos="0">
+              <a:schemeClr val="phClr">
+                <a:satMod val="103000"/>
+                <a:lumMod val="102000"/>
+                <a:tint val="94000"/>
+              </a:schemeClr>
+            </a:gs>
+            <a:gs pos="50000">
+              <a:schemeClr val="phClr">
+                <a:satMod val="110000"/>
+                <a:lumMod val="100000"/>
+                <a:shade val="100000"/>
+              </a:schemeClr>
+            </a:gs>
+            <a:gs pos="100000">
+              <a:schemeClr val="phClr">
+                <a:lumMod val="99000"/>
+                <a:satMod val="120000"/>
+                <a:shade val="78000"/>
+              </a:schemeClr>
+            </a:gs>
+          </a:gsLst>
+          <a:lin ang="5400000" scaled="0"/>
+        </a:gradFill>
+      </a:fillStyleLst>
+      <a:lnStyleLst>
+        <a:ln w="12700" cap="flat" cmpd="sng" algn="ctr">
+          <a:solidFill>
+            <a:schemeClr val="phClr"/>
+          </a:solidFill>
+          <a:prstDash val="solid"/>
+          <a:miter lim="800000"/>
+        </a:ln>
+        <a:ln w="19050" cap="flat" cmpd="sng" algn="ctr">
+          <a:solidFill>
+            <a:schemeClr val="phClr"/>
+          </a:solidFill>
+          <a:prstDash val="solid"/>
+          <a:miter lim="800000"/>
+        </a:ln>
+        <a:ln w="25400" cap="flat" cmpd="sng" algn="ctr">
+          <a:solidFill>
+            <a:schemeClr val="phClr"/>
+          </a:solidFill>
+          <a:prstDash val="solid"/>
+          <a:miter lim="800000"/>
+        </a:ln>
+      </a:lnStyleLst>
+      <a:effectStyleLst>
+        <a:effectStyle>
+          <a:effectLst/>
+        </a:effectStyle>
+        <a:effectStyle>
+          <a:effectLst/>
+        </a:effectStyle>
+        <a:effectStyle>
+          <a:effectLst>
+            <a:outerShdw blurRad="57150" dist="19050" dir="5400000" algn="ctr" rotWithShape="0">
+              <a:srgbClr val="000000">
+                <a:alpha val="63000"/>
+              </a:srgbClr>
+            </a:outerShdw>
+          </a:effectLst>
+        </a:effectStyle>
+      </a:effectStyleLst>
+      <a:bgFillStyleLst>
+        <a:solidFill>
+          <a:schemeClr val="phClr"/>
+        </a:solidFill>
+        <a:solidFill>
+          <a:schemeClr val="phClr">
+            <a:tint val="95000"/>
+            <a:satMod val="170000"/>
+          </a:schemeClr>
+        </a:solidFill>
+        <a:gradFill rotWithShape="1">
+          <a:gsLst>
+            <a:gs pos="0">
+              <a:schemeClr val="phClr">
+                <a:tint val="93000"/>
+                <a:satMod val="150000"/>
+                <a:shade val="98000"/>
+                <a:lumMod val="102000"/>
+              </a:schemeClr>
+            </a:gs>
+            <a:gs pos="50000">
+              <a:schemeClr val="phClr">
+                <a:tint val="98000"/>
+                <a:satMod val="130000"/>
+                <a:shade val="90000"/>
+                <a:lumMod val="103000"/>
+              </a:schemeClr>
+            </a:gs>
+            <a:gs pos="100000">
+              <a:schemeClr val="phClr">
+                <a:shade val="63000"/>
+                <a:satMod val="120000"/>
+              </a:schemeClr>
+            </a:gs>
+          </a:gsLst>
+          <a:lin ang="5400000" scaled="0"/>
+        </a:gradFill>
+      </a:bgFillStyleLst>
+    </a:fmtScheme>
+  </a:themeElements>
+  <a:objectDefaults>
+    <a:lnDef>
+      <a:spPr/>
+      <a:bodyPr/>
+      <a:lstStyle/>
+      <a:style>
+        <a:lnRef idx="2">
+          <a:schemeClr val="accent1"/>
+        </a:lnRef>
+        <a:fillRef idx="0">
+          <a:schemeClr val="accent1"/>
+        </a:fillRef>
+        <a:effectRef idx="1">
+          <a:schemeClr val="accent1"/>
+        </a:effectRef>
+        <a:fontRef idx="minor">
+          <a:schemeClr val="tx1"/>
+        </a:fontRef>
+      </a:style>
+    </a:lnDef>
+  </a:objectDefaults>
+  <a:extraClrSchemeLst/>
+  <a:extLst>
+    <a:ext uri="{05A4C25C-085E-4340-85A3-A5531E510DB2}">
+      <thm15:themeFamily xmlns:thm15="http://schemas.microsoft.com/office/thememl/2012/main" name="Office Theme" id="{2E142A2C-CD16-42D6-873A-C26D2A0506FA}" vid="{1BDDFF52-6CD6-40A5-AB3C-68EB2F1E4D0A}"/>
+    </a:ext>
+  </a:extLst>
+</a:theme>
 </file>